--- a/codes/data/2025/Oct_10/statistics.pptx
+++ b/codes/data/2025/Oct_10/statistics.pptx
@@ -6,9 +6,11 @@
   </p:sldMasterIdLst>
   <p:sldIdLst>
     <p:sldId id="256" r:id="rId2"/>
-    <p:sldId id="257" r:id="rId3"/>
-    <p:sldId id="258" r:id="rId4"/>
-    <p:sldId id="259" r:id="rId5"/>
+    <p:sldId id="260" r:id="rId3"/>
+    <p:sldId id="257" r:id="rId4"/>
+    <p:sldId id="258" r:id="rId5"/>
+    <p:sldId id="259" r:id="rId6"/>
+    <p:sldId id="261" r:id="rId7"/>
   </p:sldIdLst>
   <p:sldSz cx="12192000" cy="6858000"/>
   <p:notesSz cx="6858000" cy="9144000"/>
@@ -3368,7 +3370,7 @@
         </p:blipFill>
         <p:spPr>
           <a:xfrm>
-            <a:off x="61769" y="2233986"/>
+            <a:off x="61769" y="2160834"/>
             <a:ext cx="2369148" cy="1776861"/>
           </a:xfrm>
           <a:prstGeom prst="rect">
@@ -3404,7 +3406,7 @@
         </p:blipFill>
         <p:spPr>
           <a:xfrm>
-            <a:off x="61770" y="386615"/>
+            <a:off x="61770" y="313463"/>
             <a:ext cx="2369148" cy="1776861"/>
           </a:xfrm>
           <a:prstGeom prst="rect">
@@ -3440,7 +3442,7 @@
         </p:blipFill>
         <p:spPr>
           <a:xfrm>
-            <a:off x="4762900" y="2233985"/>
+            <a:off x="4762900" y="2160833"/>
             <a:ext cx="2369148" cy="1776861"/>
           </a:xfrm>
           <a:prstGeom prst="rect">
@@ -3476,7 +3478,7 @@
         </p:blipFill>
         <p:spPr>
           <a:xfrm>
-            <a:off x="4709686" y="386614"/>
+            <a:off x="4709686" y="313462"/>
             <a:ext cx="2369148" cy="1776861"/>
           </a:xfrm>
           <a:prstGeom prst="rect">
@@ -3512,7 +3514,7 @@
         </p:blipFill>
         <p:spPr>
           <a:xfrm>
-            <a:off x="2430917" y="2233985"/>
+            <a:off x="2430917" y="2160833"/>
             <a:ext cx="2369148" cy="1776861"/>
           </a:xfrm>
           <a:prstGeom prst="rect">
@@ -3548,7 +3550,7 @@
         </p:blipFill>
         <p:spPr>
           <a:xfrm>
-            <a:off x="2393752" y="386615"/>
+            <a:off x="2393752" y="313463"/>
             <a:ext cx="2369148" cy="1776861"/>
           </a:xfrm>
           <a:prstGeom prst="rect">
@@ -3584,7 +3586,7 @@
         </p:blipFill>
         <p:spPr>
           <a:xfrm>
-            <a:off x="9822852" y="2233984"/>
+            <a:off x="9822852" y="2160832"/>
             <a:ext cx="2369148" cy="1776861"/>
           </a:xfrm>
           <a:prstGeom prst="rect">
@@ -3620,7 +3622,7 @@
         </p:blipFill>
         <p:spPr>
           <a:xfrm>
-            <a:off x="9724057" y="462518"/>
+            <a:off x="9724057" y="389366"/>
             <a:ext cx="2369148" cy="1776861"/>
           </a:xfrm>
           <a:prstGeom prst="rect">
@@ -3656,7 +3658,7 @@
         </p:blipFill>
         <p:spPr>
           <a:xfrm>
-            <a:off x="7169213" y="2233984"/>
+            <a:off x="7169213" y="2160832"/>
             <a:ext cx="2369148" cy="1776861"/>
           </a:xfrm>
           <a:prstGeom prst="rect">
@@ -3692,7 +3694,7 @@
         </p:blipFill>
         <p:spPr>
           <a:xfrm>
-            <a:off x="7132048" y="462518"/>
+            <a:off x="7132048" y="389366"/>
             <a:ext cx="2369148" cy="1776861"/>
           </a:xfrm>
           <a:prstGeom prst="rect">
@@ -3738,6 +3740,366 @@
           </a:p>
         </p:txBody>
       </p:sp>
+      <p:pic>
+        <p:nvPicPr>
+          <p:cNvPr id="26" name="Picture 25">
+            <a:extLst>
+              <a:ext uri="{FF2B5EF4-FFF2-40B4-BE49-F238E27FC236}">
+                <a16:creationId xmlns:a16="http://schemas.microsoft.com/office/drawing/2014/main" id="{40E9BA3F-AD59-477D-9018-4FAB7BF7B5D4}"/>
+              </a:ext>
+            </a:extLst>
+          </p:cNvPr>
+          <p:cNvPicPr>
+            <a:picLocks noChangeAspect="1"/>
+          </p:cNvPicPr>
+          <p:nvPr/>
+        </p:nvPicPr>
+        <p:blipFill>
+          <a:blip r:embed="rId12">
+            <a:extLst>
+              <a:ext uri="{28A0092B-C50C-407E-A947-70E740481C1C}">
+                <a14:useLocalDpi xmlns:a14="http://schemas.microsoft.com/office/drawing/2010/main" val="0"/>
+              </a:ext>
+            </a:extLst>
+          </a:blip>
+          <a:stretch>
+            <a:fillRect/>
+          </a:stretch>
+        </p:blipFill>
+        <p:spPr>
+          <a:xfrm>
+            <a:off x="10008977" y="5323749"/>
+            <a:ext cx="1799307" cy="1349480"/>
+          </a:xfrm>
+          <a:prstGeom prst="rect">
+            <a:avLst/>
+          </a:prstGeom>
+        </p:spPr>
+      </p:pic>
+      <p:pic>
+        <p:nvPicPr>
+          <p:cNvPr id="28" name="Picture 27">
+            <a:extLst>
+              <a:ext uri="{FF2B5EF4-FFF2-40B4-BE49-F238E27FC236}">
+                <a16:creationId xmlns:a16="http://schemas.microsoft.com/office/drawing/2014/main" id="{EBE20C7B-D403-65B3-1D72-42B3B643AE68}"/>
+              </a:ext>
+            </a:extLst>
+          </p:cNvPr>
+          <p:cNvPicPr>
+            <a:picLocks noChangeAspect="1"/>
+          </p:cNvPicPr>
+          <p:nvPr/>
+        </p:nvPicPr>
+        <p:blipFill>
+          <a:blip r:embed="rId13">
+            <a:extLst>
+              <a:ext uri="{28A0092B-C50C-407E-A947-70E740481C1C}">
+                <a14:useLocalDpi xmlns:a14="http://schemas.microsoft.com/office/drawing/2010/main" val="0"/>
+              </a:ext>
+            </a:extLst>
+          </a:blip>
+          <a:stretch>
+            <a:fillRect/>
+          </a:stretch>
+        </p:blipFill>
+        <p:spPr>
+          <a:xfrm>
+            <a:off x="10008977" y="3949246"/>
+            <a:ext cx="1799307" cy="1349480"/>
+          </a:xfrm>
+          <a:prstGeom prst="rect">
+            <a:avLst/>
+          </a:prstGeom>
+        </p:spPr>
+      </p:pic>
+      <p:pic>
+        <p:nvPicPr>
+          <p:cNvPr id="30" name="Picture 29">
+            <a:extLst>
+              <a:ext uri="{FF2B5EF4-FFF2-40B4-BE49-F238E27FC236}">
+                <a16:creationId xmlns:a16="http://schemas.microsoft.com/office/drawing/2014/main" id="{EA7A0C68-7830-1539-D339-9CABC4941121}"/>
+              </a:ext>
+            </a:extLst>
+          </p:cNvPr>
+          <p:cNvPicPr>
+            <a:picLocks noChangeAspect="1"/>
+          </p:cNvPicPr>
+          <p:nvPr/>
+        </p:nvPicPr>
+        <p:blipFill>
+          <a:blip r:embed="rId14">
+            <a:extLst>
+              <a:ext uri="{28A0092B-C50C-407E-A947-70E740481C1C}">
+                <a14:useLocalDpi xmlns:a14="http://schemas.microsoft.com/office/drawing/2010/main" val="0"/>
+              </a:ext>
+            </a:extLst>
+          </a:blip>
+          <a:stretch>
+            <a:fillRect/>
+          </a:stretch>
+        </p:blipFill>
+        <p:spPr>
+          <a:xfrm>
+            <a:off x="7266192" y="5280347"/>
+            <a:ext cx="1799307" cy="1349480"/>
+          </a:xfrm>
+          <a:prstGeom prst="rect">
+            <a:avLst/>
+          </a:prstGeom>
+        </p:spPr>
+      </p:pic>
+      <p:pic>
+        <p:nvPicPr>
+          <p:cNvPr id="32" name="Picture 31">
+            <a:extLst>
+              <a:ext uri="{FF2B5EF4-FFF2-40B4-BE49-F238E27FC236}">
+                <a16:creationId xmlns:a16="http://schemas.microsoft.com/office/drawing/2014/main" id="{5E89F9C5-231B-6BAF-4A18-5D358FCD4549}"/>
+              </a:ext>
+            </a:extLst>
+          </p:cNvPr>
+          <p:cNvPicPr>
+            <a:picLocks noChangeAspect="1"/>
+          </p:cNvPicPr>
+          <p:nvPr/>
+        </p:nvPicPr>
+        <p:blipFill>
+          <a:blip r:embed="rId15">
+            <a:extLst>
+              <a:ext uri="{28A0092B-C50C-407E-A947-70E740481C1C}">
+                <a14:useLocalDpi xmlns:a14="http://schemas.microsoft.com/office/drawing/2010/main" val="0"/>
+              </a:ext>
+            </a:extLst>
+          </a:blip>
+          <a:stretch>
+            <a:fillRect/>
+          </a:stretch>
+        </p:blipFill>
+        <p:spPr>
+          <a:xfrm>
+            <a:off x="7266192" y="3937693"/>
+            <a:ext cx="1799307" cy="1349480"/>
+          </a:xfrm>
+          <a:prstGeom prst="rect">
+            <a:avLst/>
+          </a:prstGeom>
+        </p:spPr>
+      </p:pic>
+      <p:pic>
+        <p:nvPicPr>
+          <p:cNvPr id="34" name="Picture 33">
+            <a:extLst>
+              <a:ext uri="{FF2B5EF4-FFF2-40B4-BE49-F238E27FC236}">
+                <a16:creationId xmlns:a16="http://schemas.microsoft.com/office/drawing/2014/main" id="{51E07DA4-46F7-BA98-7F41-5DDADD239704}"/>
+              </a:ext>
+            </a:extLst>
+          </p:cNvPr>
+          <p:cNvPicPr>
+            <a:picLocks noChangeAspect="1"/>
+          </p:cNvPicPr>
+          <p:nvPr/>
+        </p:nvPicPr>
+        <p:blipFill>
+          <a:blip r:embed="rId16">
+            <a:extLst>
+              <a:ext uri="{28A0092B-C50C-407E-A947-70E740481C1C}">
+                <a14:useLocalDpi xmlns:a14="http://schemas.microsoft.com/office/drawing/2010/main" val="0"/>
+              </a:ext>
+            </a:extLst>
+          </a:blip>
+          <a:stretch>
+            <a:fillRect/>
+          </a:stretch>
+        </p:blipFill>
+        <p:spPr>
+          <a:xfrm>
+            <a:off x="4867231" y="5324724"/>
+            <a:ext cx="1799307" cy="1349480"/>
+          </a:xfrm>
+          <a:prstGeom prst="rect">
+            <a:avLst/>
+          </a:prstGeom>
+        </p:spPr>
+      </p:pic>
+      <p:pic>
+        <p:nvPicPr>
+          <p:cNvPr id="36" name="Picture 35">
+            <a:extLst>
+              <a:ext uri="{FF2B5EF4-FFF2-40B4-BE49-F238E27FC236}">
+                <a16:creationId xmlns:a16="http://schemas.microsoft.com/office/drawing/2014/main" id="{B612A614-0591-5B48-335A-4DF81976EF7F}"/>
+              </a:ext>
+            </a:extLst>
+          </p:cNvPr>
+          <p:cNvPicPr>
+            <a:picLocks noChangeAspect="1"/>
+          </p:cNvPicPr>
+          <p:nvPr/>
+        </p:nvPicPr>
+        <p:blipFill>
+          <a:blip r:embed="rId17">
+            <a:extLst>
+              <a:ext uri="{28A0092B-C50C-407E-A947-70E740481C1C}">
+                <a14:useLocalDpi xmlns:a14="http://schemas.microsoft.com/office/drawing/2010/main" val="0"/>
+              </a:ext>
+            </a:extLst>
+          </a:blip>
+          <a:stretch>
+            <a:fillRect/>
+          </a:stretch>
+        </p:blipFill>
+        <p:spPr>
+          <a:xfrm>
+            <a:off x="4867231" y="3911145"/>
+            <a:ext cx="1799307" cy="1349480"/>
+          </a:xfrm>
+          <a:prstGeom prst="rect">
+            <a:avLst/>
+          </a:prstGeom>
+        </p:spPr>
+      </p:pic>
+      <p:pic>
+        <p:nvPicPr>
+          <p:cNvPr id="38" name="Picture 37">
+            <a:extLst>
+              <a:ext uri="{FF2B5EF4-FFF2-40B4-BE49-F238E27FC236}">
+                <a16:creationId xmlns:a16="http://schemas.microsoft.com/office/drawing/2014/main" id="{16298736-7AE8-B196-BC96-96299F12D8E4}"/>
+              </a:ext>
+            </a:extLst>
+          </p:cNvPr>
+          <p:cNvPicPr>
+            <a:picLocks noChangeAspect="1"/>
+          </p:cNvPicPr>
+          <p:nvPr/>
+        </p:nvPicPr>
+        <p:blipFill>
+          <a:blip r:embed="rId18">
+            <a:extLst>
+              <a:ext uri="{28A0092B-C50C-407E-A947-70E740481C1C}">
+                <a14:useLocalDpi xmlns:a14="http://schemas.microsoft.com/office/drawing/2010/main" val="0"/>
+              </a:ext>
+            </a:extLst>
+          </a:blip>
+          <a:stretch>
+            <a:fillRect/>
+          </a:stretch>
+        </p:blipFill>
+        <p:spPr>
+          <a:xfrm>
+            <a:off x="2393752" y="5324724"/>
+            <a:ext cx="1799307" cy="1349480"/>
+          </a:xfrm>
+          <a:prstGeom prst="rect">
+            <a:avLst/>
+          </a:prstGeom>
+        </p:spPr>
+      </p:pic>
+      <p:pic>
+        <p:nvPicPr>
+          <p:cNvPr id="40" name="Picture 39">
+            <a:extLst>
+              <a:ext uri="{FF2B5EF4-FFF2-40B4-BE49-F238E27FC236}">
+                <a16:creationId xmlns:a16="http://schemas.microsoft.com/office/drawing/2014/main" id="{6CB9B187-12FE-A3F2-5766-66AD17E5B3BB}"/>
+              </a:ext>
+            </a:extLst>
+          </p:cNvPr>
+          <p:cNvPicPr>
+            <a:picLocks noChangeAspect="1"/>
+          </p:cNvPicPr>
+          <p:nvPr/>
+        </p:nvPicPr>
+        <p:blipFill>
+          <a:blip r:embed="rId19">
+            <a:extLst>
+              <a:ext uri="{28A0092B-C50C-407E-A947-70E740481C1C}">
+                <a14:useLocalDpi xmlns:a14="http://schemas.microsoft.com/office/drawing/2010/main" val="0"/>
+              </a:ext>
+            </a:extLst>
+          </a:blip>
+          <a:stretch>
+            <a:fillRect/>
+          </a:stretch>
+        </p:blipFill>
+        <p:spPr>
+          <a:xfrm>
+            <a:off x="2430917" y="3937693"/>
+            <a:ext cx="1799307" cy="1349480"/>
+          </a:xfrm>
+          <a:prstGeom prst="rect">
+            <a:avLst/>
+          </a:prstGeom>
+        </p:spPr>
+      </p:pic>
+      <p:pic>
+        <p:nvPicPr>
+          <p:cNvPr id="44" name="Picture 43">
+            <a:extLst>
+              <a:ext uri="{FF2B5EF4-FFF2-40B4-BE49-F238E27FC236}">
+                <a16:creationId xmlns:a16="http://schemas.microsoft.com/office/drawing/2014/main" id="{98B981A3-EE3C-6F17-F362-A7D0C522E7BF}"/>
+              </a:ext>
+            </a:extLst>
+          </p:cNvPr>
+          <p:cNvPicPr>
+            <a:picLocks noChangeAspect="1"/>
+          </p:cNvPicPr>
+          <p:nvPr/>
+        </p:nvPicPr>
+        <p:blipFill>
+          <a:blip r:embed="rId20">
+            <a:extLst>
+              <a:ext uri="{28A0092B-C50C-407E-A947-70E740481C1C}">
+                <a14:useLocalDpi xmlns:a14="http://schemas.microsoft.com/office/drawing/2010/main" val="0"/>
+              </a:ext>
+            </a:extLst>
+          </a:blip>
+          <a:stretch>
+            <a:fillRect/>
+          </a:stretch>
+        </p:blipFill>
+        <p:spPr>
+          <a:xfrm>
+            <a:off x="159094" y="3937693"/>
+            <a:ext cx="1799307" cy="1349480"/>
+          </a:xfrm>
+          <a:prstGeom prst="rect">
+            <a:avLst/>
+          </a:prstGeom>
+        </p:spPr>
+      </p:pic>
+      <p:pic>
+        <p:nvPicPr>
+          <p:cNvPr id="46" name="Picture 45">
+            <a:extLst>
+              <a:ext uri="{FF2B5EF4-FFF2-40B4-BE49-F238E27FC236}">
+                <a16:creationId xmlns:a16="http://schemas.microsoft.com/office/drawing/2014/main" id="{B1BCC0F4-8039-8682-175C-44931BA2505C}"/>
+              </a:ext>
+            </a:extLst>
+          </p:cNvPr>
+          <p:cNvPicPr>
+            <a:picLocks noChangeAspect="1"/>
+          </p:cNvPicPr>
+          <p:nvPr/>
+        </p:nvPicPr>
+        <p:blipFill>
+          <a:blip r:embed="rId21">
+            <a:extLst>
+              <a:ext uri="{28A0092B-C50C-407E-A947-70E740481C1C}">
+                <a14:useLocalDpi xmlns:a14="http://schemas.microsoft.com/office/drawing/2010/main" val="0"/>
+              </a:ext>
+            </a:extLst>
+          </a:blip>
+          <a:stretch>
+            <a:fillRect/>
+          </a:stretch>
+        </p:blipFill>
+        <p:spPr>
+          <a:xfrm>
+            <a:off x="61769" y="5324724"/>
+            <a:ext cx="1799307" cy="1349480"/>
+          </a:xfrm>
+          <a:prstGeom prst="rect">
+            <a:avLst/>
+          </a:prstGeom>
+        </p:spPr>
+      </p:pic>
     </p:spTree>
     <p:extLst>
       <p:ext uri="{BB962C8B-B14F-4D97-AF65-F5344CB8AC3E}">
@@ -3773,7 +4135,7 @@
           <p:cNvPr id="3" name="Picture 2">
             <a:extLst>
               <a:ext uri="{FF2B5EF4-FFF2-40B4-BE49-F238E27FC236}">
-                <a16:creationId xmlns:a16="http://schemas.microsoft.com/office/drawing/2014/main" id="{3DB269A8-DFB9-A6C4-F653-B0594918CA64}"/>
+                <a16:creationId xmlns:a16="http://schemas.microsoft.com/office/drawing/2014/main" id="{AEC337E3-E438-9B3C-9FAF-604F81B1B82B}"/>
               </a:ext>
             </a:extLst>
           </p:cNvPr>
@@ -3796,8 +4158,8 @@
         </p:blipFill>
         <p:spPr>
           <a:xfrm>
-            <a:off x="347400" y="3783720"/>
-            <a:ext cx="3974400" cy="2980800"/>
+            <a:off x="7084658" y="3333522"/>
+            <a:ext cx="4483608" cy="3362706"/>
           </a:xfrm>
           <a:prstGeom prst="rect">
             <a:avLst/>
@@ -3809,7 +4171,7 @@
           <p:cNvPr id="5" name="Picture 4">
             <a:extLst>
               <a:ext uri="{FF2B5EF4-FFF2-40B4-BE49-F238E27FC236}">
-                <a16:creationId xmlns:a16="http://schemas.microsoft.com/office/drawing/2014/main" id="{90A2FAD1-A83F-4A3C-3884-0317F420D7A6}"/>
+                <a16:creationId xmlns:a16="http://schemas.microsoft.com/office/drawing/2014/main" id="{ACD0568E-32EF-E2F3-5E1F-5EAE3800BE60}"/>
               </a:ext>
             </a:extLst>
           </p:cNvPr>
@@ -3832,8 +4194,8 @@
         </p:blipFill>
         <p:spPr>
           <a:xfrm>
-            <a:off x="367484" y="676430"/>
-            <a:ext cx="3974400" cy="2980800"/>
+            <a:off x="7084658" y="447714"/>
+            <a:ext cx="4483608" cy="3362706"/>
           </a:xfrm>
           <a:prstGeom prst="rect">
             <a:avLst/>
@@ -3845,7 +4207,7 @@
           <p:cNvPr id="7" name="Picture 6">
             <a:extLst>
               <a:ext uri="{FF2B5EF4-FFF2-40B4-BE49-F238E27FC236}">
-                <a16:creationId xmlns:a16="http://schemas.microsoft.com/office/drawing/2014/main" id="{DC841B60-AAAF-E083-B64D-D96DB278C68D}"/>
+                <a16:creationId xmlns:a16="http://schemas.microsoft.com/office/drawing/2014/main" id="{142FB4A1-2630-3D82-F088-EB553211B5E1}"/>
               </a:ext>
             </a:extLst>
           </p:cNvPr>
@@ -3868,8 +4230,8 @@
         </p:blipFill>
         <p:spPr>
           <a:xfrm>
-            <a:off x="4524284" y="3856872"/>
-            <a:ext cx="3974400" cy="2980800"/>
+            <a:off x="623736" y="3333522"/>
+            <a:ext cx="4483608" cy="3362706"/>
           </a:xfrm>
           <a:prstGeom prst="rect">
             <a:avLst/>
@@ -3881,7 +4243,7 @@
           <p:cNvPr id="9" name="Picture 8">
             <a:extLst>
               <a:ext uri="{FF2B5EF4-FFF2-40B4-BE49-F238E27FC236}">
-                <a16:creationId xmlns:a16="http://schemas.microsoft.com/office/drawing/2014/main" id="{C0873338-33C4-4A3B-D4B5-CCF5573DB597}"/>
+                <a16:creationId xmlns:a16="http://schemas.microsoft.com/office/drawing/2014/main" id="{725EEFB8-3FDC-4551-676F-638204E5BDC0}"/>
               </a:ext>
             </a:extLst>
           </p:cNvPr>
@@ -3904,92 +4266,20 @@
         </p:blipFill>
         <p:spPr>
           <a:xfrm>
-            <a:off x="4321800" y="676430"/>
-            <a:ext cx="3974400" cy="2980800"/>
+            <a:off x="623736" y="447714"/>
+            <a:ext cx="4483608" cy="3362706"/>
           </a:xfrm>
           <a:prstGeom prst="rect">
             <a:avLst/>
           </a:prstGeom>
         </p:spPr>
       </p:pic>
-      <p:pic>
-        <p:nvPicPr>
-          <p:cNvPr id="11" name="Picture 10">
-            <a:extLst>
-              <a:ext uri="{FF2B5EF4-FFF2-40B4-BE49-F238E27FC236}">
-                <a16:creationId xmlns:a16="http://schemas.microsoft.com/office/drawing/2014/main" id="{7C899D91-268E-C3B4-86FD-D409542DB347}"/>
-              </a:ext>
-            </a:extLst>
-          </p:cNvPr>
-          <p:cNvPicPr>
-            <a:picLocks noChangeAspect="1"/>
-          </p:cNvPicPr>
-          <p:nvPr/>
-        </p:nvPicPr>
-        <p:blipFill>
-          <a:blip r:embed="rId6">
-            <a:extLst>
-              <a:ext uri="{28A0092B-C50C-407E-A947-70E740481C1C}">
-                <a14:useLocalDpi xmlns:a14="http://schemas.microsoft.com/office/drawing/2010/main" val="0"/>
-              </a:ext>
-            </a:extLst>
-          </a:blip>
-          <a:stretch>
-            <a:fillRect/>
-          </a:stretch>
-        </p:blipFill>
-        <p:spPr>
-          <a:xfrm>
-            <a:off x="8217600" y="3856872"/>
-            <a:ext cx="3974400" cy="2980800"/>
-          </a:xfrm>
-          <a:prstGeom prst="rect">
-            <a:avLst/>
-          </a:prstGeom>
-        </p:spPr>
-      </p:pic>
-      <p:pic>
-        <p:nvPicPr>
-          <p:cNvPr id="13" name="Picture 12">
-            <a:extLst>
-              <a:ext uri="{FF2B5EF4-FFF2-40B4-BE49-F238E27FC236}">
-                <a16:creationId xmlns:a16="http://schemas.microsoft.com/office/drawing/2014/main" id="{09A432A2-6D24-0A2F-8EAC-7AC193CCB778}"/>
-              </a:ext>
-            </a:extLst>
-          </p:cNvPr>
-          <p:cNvPicPr>
-            <a:picLocks noChangeAspect="1"/>
-          </p:cNvPicPr>
-          <p:nvPr/>
-        </p:nvPicPr>
-        <p:blipFill>
-          <a:blip r:embed="rId7">
-            <a:extLst>
-              <a:ext uri="{28A0092B-C50C-407E-A947-70E740481C1C}">
-                <a14:useLocalDpi xmlns:a14="http://schemas.microsoft.com/office/drawing/2010/main" val="0"/>
-              </a:ext>
-            </a:extLst>
-          </a:blip>
-          <a:stretch>
-            <a:fillRect/>
-          </a:stretch>
-        </p:blipFill>
-        <p:spPr>
-          <a:xfrm>
-            <a:off x="8296200" y="676430"/>
-            <a:ext cx="3974400" cy="2980800"/>
-          </a:xfrm>
-          <a:prstGeom prst="rect">
-            <a:avLst/>
-          </a:prstGeom>
-        </p:spPr>
-      </p:pic>
-      <p:sp>
-        <p:nvSpPr>
-          <p:cNvPr id="14" name="TextBox 13">
-            <a:extLst>
-              <a:ext uri="{FF2B5EF4-FFF2-40B4-BE49-F238E27FC236}">
-                <a16:creationId xmlns:a16="http://schemas.microsoft.com/office/drawing/2014/main" id="{976B7937-E2A4-2E35-88E5-F25B7652E0E6}"/>
+      <p:sp>
+        <p:nvSpPr>
+          <p:cNvPr id="10" name="TextBox 9">
+            <a:extLst>
+              <a:ext uri="{FF2B5EF4-FFF2-40B4-BE49-F238E27FC236}">
+                <a16:creationId xmlns:a16="http://schemas.microsoft.com/office/drawing/2014/main" id="{5952A105-E87D-A776-EA4A-C2AF0B79DB97}"/>
               </a:ext>
             </a:extLst>
           </p:cNvPr>
@@ -3998,7 +4288,7 @@
         </p:nvSpPr>
         <p:spPr>
           <a:xfrm>
-            <a:off x="923544" y="307098"/>
+            <a:off x="4709686" y="17282"/>
             <a:ext cx="2642616" cy="369332"/>
           </a:xfrm>
           <a:prstGeom prst="rect">
@@ -4017,83 +4307,7 @@
                 <a:latin typeface="Times New Roman" panose="02020603050405020304" pitchFamily="18" charset="0"/>
                 <a:cs typeface="Times New Roman" panose="02020603050405020304" pitchFamily="18" charset="0"/>
               </a:rPr>
-              <a:t>Counts : 100k (@1mW) </a:t>
-            </a:r>
-          </a:p>
-        </p:txBody>
-      </p:sp>
-      <p:sp>
-        <p:nvSpPr>
-          <p:cNvPr id="17" name="TextBox 16">
-            <a:extLst>
-              <a:ext uri="{FF2B5EF4-FFF2-40B4-BE49-F238E27FC236}">
-                <a16:creationId xmlns:a16="http://schemas.microsoft.com/office/drawing/2014/main" id="{689C1C0B-2E88-19E6-30E6-6BF0626D8FD1}"/>
-              </a:ext>
-            </a:extLst>
-          </p:cNvPr>
-          <p:cNvSpPr txBox="1"/>
-          <p:nvPr/>
-        </p:nvSpPr>
-        <p:spPr>
-          <a:xfrm>
-            <a:off x="4820412" y="274832"/>
-            <a:ext cx="2642616" cy="369332"/>
-          </a:xfrm>
-          <a:prstGeom prst="rect">
-            <a:avLst/>
-          </a:prstGeom>
-          <a:noFill/>
-        </p:spPr>
-        <p:txBody>
-          <a:bodyPr wrap="square" rtlCol="0">
-            <a:spAutoFit/>
-          </a:bodyPr>
-          <a:lstStyle/>
-          <a:p>
-            <a:r>
-              <a:rPr lang="en-US" dirty="0">
-                <a:latin typeface="Times New Roman" panose="02020603050405020304" pitchFamily="18" charset="0"/>
-                <a:cs typeface="Times New Roman" panose="02020603050405020304" pitchFamily="18" charset="0"/>
-              </a:rPr>
-              <a:t>Counts : 60k (@1mW) </a:t>
-            </a:r>
-          </a:p>
-        </p:txBody>
-      </p:sp>
-      <p:sp>
-        <p:nvSpPr>
-          <p:cNvPr id="18" name="TextBox 17">
-            <a:extLst>
-              <a:ext uri="{FF2B5EF4-FFF2-40B4-BE49-F238E27FC236}">
-                <a16:creationId xmlns:a16="http://schemas.microsoft.com/office/drawing/2014/main" id="{B0EC5EFC-FDB0-B561-5CF0-86A15FEB4185}"/>
-              </a:ext>
-            </a:extLst>
-          </p:cNvPr>
-          <p:cNvSpPr txBox="1"/>
-          <p:nvPr/>
-        </p:nvSpPr>
-        <p:spPr>
-          <a:xfrm>
-            <a:off x="8717280" y="274832"/>
-            <a:ext cx="2642616" cy="369332"/>
-          </a:xfrm>
-          <a:prstGeom prst="rect">
-            <a:avLst/>
-          </a:prstGeom>
-          <a:noFill/>
-        </p:spPr>
-        <p:txBody>
-          <a:bodyPr wrap="square" rtlCol="0">
-            <a:spAutoFit/>
-          </a:bodyPr>
-          <a:lstStyle/>
-          <a:p>
-            <a:r>
-              <a:rPr lang="en-US" dirty="0">
-                <a:latin typeface="Times New Roman" panose="02020603050405020304" pitchFamily="18" charset="0"/>
-                <a:cs typeface="Times New Roman" panose="02020603050405020304" pitchFamily="18" charset="0"/>
-              </a:rPr>
-              <a:t>Counts : 16k (@1mW) </a:t>
+              <a:t>Counts : 120k (@1mW) </a:t>
             </a:r>
           </a:p>
         </p:txBody>
@@ -4101,7 +4315,7 @@
     </p:spTree>
     <p:extLst>
       <p:ext uri="{BB962C8B-B14F-4D97-AF65-F5344CB8AC3E}">
-        <p14:creationId xmlns:p14="http://schemas.microsoft.com/office/powerpoint/2010/main" val="3317625823"/>
+        <p14:creationId xmlns:p14="http://schemas.microsoft.com/office/powerpoint/2010/main" val="60002303"/>
       </p:ext>
     </p:extLst>
   </p:cSld>
@@ -4133,7 +4347,7 @@
           <p:cNvPr id="3" name="Picture 2">
             <a:extLst>
               <a:ext uri="{FF2B5EF4-FFF2-40B4-BE49-F238E27FC236}">
-                <a16:creationId xmlns:a16="http://schemas.microsoft.com/office/drawing/2014/main" id="{84B1BADE-8340-E6A8-2455-701C7A15C923}"/>
+                <a16:creationId xmlns:a16="http://schemas.microsoft.com/office/drawing/2014/main" id="{3DB269A8-DFB9-A6C4-F653-B0594918CA64}"/>
               </a:ext>
             </a:extLst>
           </p:cNvPr>
@@ -4156,8 +4370,8 @@
         </p:blipFill>
         <p:spPr>
           <a:xfrm>
-            <a:off x="39757" y="3648456"/>
-            <a:ext cx="4215032" cy="3161274"/>
+            <a:off x="852116" y="2704728"/>
+            <a:ext cx="2800920" cy="2100690"/>
           </a:xfrm>
           <a:prstGeom prst="rect">
             <a:avLst/>
@@ -4169,7 +4383,7 @@
           <p:cNvPr id="5" name="Picture 4">
             <a:extLst>
               <a:ext uri="{FF2B5EF4-FFF2-40B4-BE49-F238E27FC236}">
-                <a16:creationId xmlns:a16="http://schemas.microsoft.com/office/drawing/2014/main" id="{E38783BE-698C-5996-471D-32C46269E5A6}"/>
+                <a16:creationId xmlns:a16="http://schemas.microsoft.com/office/drawing/2014/main" id="{90A2FAD1-A83F-4A3C-3884-0317F420D7A6}"/>
               </a:ext>
             </a:extLst>
           </p:cNvPr>
@@ -4192,8 +4406,8 @@
         </p:blipFill>
         <p:spPr>
           <a:xfrm>
-            <a:off x="39757" y="588912"/>
-            <a:ext cx="4215032" cy="3161274"/>
+            <a:off x="852116" y="676430"/>
+            <a:ext cx="2800920" cy="2100690"/>
           </a:xfrm>
           <a:prstGeom prst="rect">
             <a:avLst/>
@@ -4205,7 +4419,7 @@
           <p:cNvPr id="7" name="Picture 6">
             <a:extLst>
               <a:ext uri="{FF2B5EF4-FFF2-40B4-BE49-F238E27FC236}">
-                <a16:creationId xmlns:a16="http://schemas.microsoft.com/office/drawing/2014/main" id="{97D48406-6243-4F5E-A687-7170DB6158C4}"/>
+                <a16:creationId xmlns:a16="http://schemas.microsoft.com/office/drawing/2014/main" id="{DC841B60-AAAF-E083-B64D-D96DB278C68D}"/>
               </a:ext>
             </a:extLst>
           </p:cNvPr>
@@ -4228,8 +4442,8 @@
         </p:blipFill>
         <p:spPr>
           <a:xfrm>
-            <a:off x="3988484" y="3648456"/>
-            <a:ext cx="4215032" cy="3161274"/>
+            <a:off x="4688876" y="2805312"/>
+            <a:ext cx="2800920" cy="2100690"/>
           </a:xfrm>
           <a:prstGeom prst="rect">
             <a:avLst/>
@@ -4241,7 +4455,7 @@
           <p:cNvPr id="9" name="Picture 8">
             <a:extLst>
               <a:ext uri="{FF2B5EF4-FFF2-40B4-BE49-F238E27FC236}">
-                <a16:creationId xmlns:a16="http://schemas.microsoft.com/office/drawing/2014/main" id="{73636A4E-23F2-C199-BDA3-19F41DADEE8E}"/>
+                <a16:creationId xmlns:a16="http://schemas.microsoft.com/office/drawing/2014/main" id="{C0873338-33C4-4A3B-D4B5-CCF5573DB597}"/>
               </a:ext>
             </a:extLst>
           </p:cNvPr>
@@ -4264,8 +4478,8 @@
         </p:blipFill>
         <p:spPr>
           <a:xfrm>
-            <a:off x="3911936" y="588912"/>
-            <a:ext cx="4215032" cy="3161274"/>
+            <a:off x="4806432" y="676430"/>
+            <a:ext cx="2800920" cy="2100690"/>
           </a:xfrm>
           <a:prstGeom prst="rect">
             <a:avLst/>
@@ -4277,7 +4491,7 @@
           <p:cNvPr id="11" name="Picture 10">
             <a:extLst>
               <a:ext uri="{FF2B5EF4-FFF2-40B4-BE49-F238E27FC236}">
-                <a16:creationId xmlns:a16="http://schemas.microsoft.com/office/drawing/2014/main" id="{09A465B0-E260-561D-DECA-39A6B56C714D}"/>
+                <a16:creationId xmlns:a16="http://schemas.microsoft.com/office/drawing/2014/main" id="{7C899D91-268E-C3B4-86FD-D409542DB347}"/>
               </a:ext>
             </a:extLst>
           </p:cNvPr>
@@ -4300,8 +4514,8 @@
         </p:blipFill>
         <p:spPr>
           <a:xfrm>
-            <a:off x="7976968" y="3648456"/>
-            <a:ext cx="4215032" cy="3161274"/>
+            <a:off x="8382192" y="2805312"/>
+            <a:ext cx="2800920" cy="2100690"/>
           </a:xfrm>
           <a:prstGeom prst="rect">
             <a:avLst/>
@@ -4313,7 +4527,7 @@
           <p:cNvPr id="13" name="Picture 12">
             <a:extLst>
               <a:ext uri="{FF2B5EF4-FFF2-40B4-BE49-F238E27FC236}">
-                <a16:creationId xmlns:a16="http://schemas.microsoft.com/office/drawing/2014/main" id="{60E33847-42EB-58D0-6CA8-3CF61ACBA69F}"/>
+                <a16:creationId xmlns:a16="http://schemas.microsoft.com/office/drawing/2014/main" id="{09A432A2-6D24-0A2F-8EAC-7AC193CCB778}"/>
               </a:ext>
             </a:extLst>
           </p:cNvPr>
@@ -4336,8 +4550,8 @@
         </p:blipFill>
         <p:spPr>
           <a:xfrm>
-            <a:off x="7976968" y="588912"/>
-            <a:ext cx="4215032" cy="3161274"/>
+            <a:off x="8780832" y="676430"/>
+            <a:ext cx="2800920" cy="2100690"/>
           </a:xfrm>
           <a:prstGeom prst="rect">
             <a:avLst/>
@@ -4349,7 +4563,7 @@
           <p:cNvPr id="14" name="TextBox 13">
             <a:extLst>
               <a:ext uri="{FF2B5EF4-FFF2-40B4-BE49-F238E27FC236}">
-                <a16:creationId xmlns:a16="http://schemas.microsoft.com/office/drawing/2014/main" id="{A8D76BC5-4028-50C4-0286-5B39CFC1FE8B}"/>
+                <a16:creationId xmlns:a16="http://schemas.microsoft.com/office/drawing/2014/main" id="{976B7937-E2A4-2E35-88E5-F25B7652E0E6}"/>
               </a:ext>
             </a:extLst>
           </p:cNvPr>
@@ -4358,7 +4572,7 @@
         </p:nvSpPr>
         <p:spPr>
           <a:xfrm>
-            <a:off x="786384" y="307098"/>
+            <a:off x="923544" y="307098"/>
             <a:ext cx="2642616" cy="369332"/>
           </a:xfrm>
           <a:prstGeom prst="rect">
@@ -4384,10 +4598,10 @@
       </p:sp>
       <p:sp>
         <p:nvSpPr>
-          <p:cNvPr id="15" name="TextBox 14">
-            <a:extLst>
-              <a:ext uri="{FF2B5EF4-FFF2-40B4-BE49-F238E27FC236}">
-                <a16:creationId xmlns:a16="http://schemas.microsoft.com/office/drawing/2014/main" id="{4469BC6B-1C4A-AA8C-F769-EE6278D7E9DD}"/>
+          <p:cNvPr id="17" name="TextBox 16">
+            <a:extLst>
+              <a:ext uri="{FF2B5EF4-FFF2-40B4-BE49-F238E27FC236}">
+                <a16:creationId xmlns:a16="http://schemas.microsoft.com/office/drawing/2014/main" id="{689C1C0B-2E88-19E6-30E6-6BF0626D8FD1}"/>
               </a:ext>
             </a:extLst>
           </p:cNvPr>
@@ -4396,7 +4610,7 @@
         </p:nvSpPr>
         <p:spPr>
           <a:xfrm>
-            <a:off x="4683252" y="274832"/>
+            <a:off x="4820412" y="274832"/>
             <a:ext cx="2642616" cy="369332"/>
           </a:xfrm>
           <a:prstGeom prst="rect">
@@ -4422,10 +4636,10 @@
       </p:sp>
       <p:sp>
         <p:nvSpPr>
-          <p:cNvPr id="16" name="TextBox 15">
-            <a:extLst>
-              <a:ext uri="{FF2B5EF4-FFF2-40B4-BE49-F238E27FC236}">
-                <a16:creationId xmlns:a16="http://schemas.microsoft.com/office/drawing/2014/main" id="{94F15E2C-03F3-3EB6-B50E-420DB7A4336E}"/>
+          <p:cNvPr id="18" name="TextBox 17">
+            <a:extLst>
+              <a:ext uri="{FF2B5EF4-FFF2-40B4-BE49-F238E27FC236}">
+                <a16:creationId xmlns:a16="http://schemas.microsoft.com/office/drawing/2014/main" id="{B0EC5EFC-FDB0-B561-5CF0-86A15FEB4185}"/>
               </a:ext>
             </a:extLst>
           </p:cNvPr>
@@ -4434,7 +4648,7 @@
         </p:nvSpPr>
         <p:spPr>
           <a:xfrm>
-            <a:off x="8580120" y="274832"/>
+            <a:off x="8717280" y="274832"/>
             <a:ext cx="2642616" cy="369332"/>
           </a:xfrm>
           <a:prstGeom prst="rect">
@@ -4458,10 +4672,226 @@
           </a:p>
         </p:txBody>
       </p:sp>
+      <p:pic>
+        <p:nvPicPr>
+          <p:cNvPr id="25" name="Picture 24">
+            <a:extLst>
+              <a:ext uri="{FF2B5EF4-FFF2-40B4-BE49-F238E27FC236}">
+                <a16:creationId xmlns:a16="http://schemas.microsoft.com/office/drawing/2014/main" id="{698966CA-C739-FC52-6124-C0F0E66F2070}"/>
+              </a:ext>
+            </a:extLst>
+          </p:cNvPr>
+          <p:cNvPicPr>
+            <a:picLocks noChangeAspect="1"/>
+          </p:cNvPicPr>
+          <p:nvPr/>
+        </p:nvPicPr>
+        <p:blipFill>
+          <a:blip r:embed="rId8">
+            <a:extLst>
+              <a:ext uri="{28A0092B-C50C-407E-A947-70E740481C1C}">
+                <a14:useLocalDpi xmlns:a14="http://schemas.microsoft.com/office/drawing/2010/main" val="0"/>
+              </a:ext>
+            </a:extLst>
+          </a:blip>
+          <a:stretch>
+            <a:fillRect/>
+          </a:stretch>
+        </p:blipFill>
+        <p:spPr>
+          <a:xfrm>
+            <a:off x="2090052" y="5099756"/>
+            <a:ext cx="1749552" cy="1312164"/>
+          </a:xfrm>
+          <a:prstGeom prst="rect">
+            <a:avLst/>
+          </a:prstGeom>
+        </p:spPr>
+      </p:pic>
+      <p:pic>
+        <p:nvPicPr>
+          <p:cNvPr id="27" name="Picture 26">
+            <a:extLst>
+              <a:ext uri="{FF2B5EF4-FFF2-40B4-BE49-F238E27FC236}">
+                <a16:creationId xmlns:a16="http://schemas.microsoft.com/office/drawing/2014/main" id="{9770CAC3-5C0B-3491-037D-018F42DC01DC}"/>
+              </a:ext>
+            </a:extLst>
+          </p:cNvPr>
+          <p:cNvPicPr>
+            <a:picLocks noChangeAspect="1"/>
+          </p:cNvPicPr>
+          <p:nvPr/>
+        </p:nvPicPr>
+        <p:blipFill>
+          <a:blip r:embed="rId9">
+            <a:extLst>
+              <a:ext uri="{28A0092B-C50C-407E-A947-70E740481C1C}">
+                <a14:useLocalDpi xmlns:a14="http://schemas.microsoft.com/office/drawing/2010/main" val="0"/>
+              </a:ext>
+            </a:extLst>
+          </a:blip>
+          <a:stretch>
+            <a:fillRect/>
+          </a:stretch>
+        </p:blipFill>
+        <p:spPr>
+          <a:xfrm>
+            <a:off x="340500" y="5099756"/>
+            <a:ext cx="1749552" cy="1312164"/>
+          </a:xfrm>
+          <a:prstGeom prst="rect">
+            <a:avLst/>
+          </a:prstGeom>
+        </p:spPr>
+      </p:pic>
+      <p:pic>
+        <p:nvPicPr>
+          <p:cNvPr id="29" name="Picture 28">
+            <a:extLst>
+              <a:ext uri="{FF2B5EF4-FFF2-40B4-BE49-F238E27FC236}">
+                <a16:creationId xmlns:a16="http://schemas.microsoft.com/office/drawing/2014/main" id="{809FFEB3-6F12-E46E-2180-8572C148E1D3}"/>
+              </a:ext>
+            </a:extLst>
+          </p:cNvPr>
+          <p:cNvPicPr>
+            <a:picLocks noChangeAspect="1"/>
+          </p:cNvPicPr>
+          <p:nvPr/>
+        </p:nvPicPr>
+        <p:blipFill>
+          <a:blip r:embed="rId10">
+            <a:extLst>
+              <a:ext uri="{28A0092B-C50C-407E-A947-70E740481C1C}">
+                <a14:useLocalDpi xmlns:a14="http://schemas.microsoft.com/office/drawing/2010/main" val="0"/>
+              </a:ext>
+            </a:extLst>
+          </a:blip>
+          <a:stretch>
+            <a:fillRect/>
+          </a:stretch>
+        </p:blipFill>
+        <p:spPr>
+          <a:xfrm>
+            <a:off x="5818974" y="5185756"/>
+            <a:ext cx="1749552" cy="1312164"/>
+          </a:xfrm>
+          <a:prstGeom prst="rect">
+            <a:avLst/>
+          </a:prstGeom>
+        </p:spPr>
+      </p:pic>
+      <p:pic>
+        <p:nvPicPr>
+          <p:cNvPr id="31" name="Picture 30">
+            <a:extLst>
+              <a:ext uri="{FF2B5EF4-FFF2-40B4-BE49-F238E27FC236}">
+                <a16:creationId xmlns:a16="http://schemas.microsoft.com/office/drawing/2014/main" id="{DFAC4D9F-0750-1DB4-77AC-766AA6C20087}"/>
+              </a:ext>
+            </a:extLst>
+          </p:cNvPr>
+          <p:cNvPicPr>
+            <a:picLocks noChangeAspect="1"/>
+          </p:cNvPicPr>
+          <p:nvPr/>
+        </p:nvPicPr>
+        <p:blipFill>
+          <a:blip r:embed="rId11">
+            <a:extLst>
+              <a:ext uri="{28A0092B-C50C-407E-A947-70E740481C1C}">
+                <a14:useLocalDpi xmlns:a14="http://schemas.microsoft.com/office/drawing/2010/main" val="0"/>
+              </a:ext>
+            </a:extLst>
+          </a:blip>
+          <a:stretch>
+            <a:fillRect/>
+          </a:stretch>
+        </p:blipFill>
+        <p:spPr>
+          <a:xfrm>
+            <a:off x="3931656" y="5099756"/>
+            <a:ext cx="1749552" cy="1312164"/>
+          </a:xfrm>
+          <a:prstGeom prst="rect">
+            <a:avLst/>
+          </a:prstGeom>
+        </p:spPr>
+      </p:pic>
+      <p:pic>
+        <p:nvPicPr>
+          <p:cNvPr id="33" name="Picture 32">
+            <a:extLst>
+              <a:ext uri="{FF2B5EF4-FFF2-40B4-BE49-F238E27FC236}">
+                <a16:creationId xmlns:a16="http://schemas.microsoft.com/office/drawing/2014/main" id="{421F2D10-E3B0-3FB6-FF20-AC5DBC86F307}"/>
+              </a:ext>
+            </a:extLst>
+          </p:cNvPr>
+          <p:cNvPicPr>
+            <a:picLocks noChangeAspect="1"/>
+          </p:cNvPicPr>
+          <p:nvPr/>
+        </p:nvPicPr>
+        <p:blipFill>
+          <a:blip r:embed="rId12">
+            <a:extLst>
+              <a:ext uri="{28A0092B-C50C-407E-A947-70E740481C1C}">
+                <a14:useLocalDpi xmlns:a14="http://schemas.microsoft.com/office/drawing/2010/main" val="0"/>
+              </a:ext>
+            </a:extLst>
+          </a:blip>
+          <a:stretch>
+            <a:fillRect/>
+          </a:stretch>
+        </p:blipFill>
+        <p:spPr>
+          <a:xfrm>
+            <a:off x="9832200" y="5185756"/>
+            <a:ext cx="1749552" cy="1312164"/>
+          </a:xfrm>
+          <a:prstGeom prst="rect">
+            <a:avLst/>
+          </a:prstGeom>
+        </p:spPr>
+      </p:pic>
+      <p:pic>
+        <p:nvPicPr>
+          <p:cNvPr id="35" name="Picture 34">
+            <a:extLst>
+              <a:ext uri="{FF2B5EF4-FFF2-40B4-BE49-F238E27FC236}">
+                <a16:creationId xmlns:a16="http://schemas.microsoft.com/office/drawing/2014/main" id="{51584488-AB29-A707-52ED-167B1AEDB59C}"/>
+              </a:ext>
+            </a:extLst>
+          </p:cNvPr>
+          <p:cNvPicPr>
+            <a:picLocks noChangeAspect="1"/>
+          </p:cNvPicPr>
+          <p:nvPr/>
+        </p:nvPicPr>
+        <p:blipFill>
+          <a:blip r:embed="rId13">
+            <a:extLst>
+              <a:ext uri="{28A0092B-C50C-407E-A947-70E740481C1C}">
+                <a14:useLocalDpi xmlns:a14="http://schemas.microsoft.com/office/drawing/2010/main" val="0"/>
+              </a:ext>
+            </a:extLst>
+          </a:blip>
+          <a:stretch>
+            <a:fillRect/>
+          </a:stretch>
+        </p:blipFill>
+        <p:spPr>
+          <a:xfrm>
+            <a:off x="7761924" y="5185756"/>
+            <a:ext cx="1749552" cy="1312164"/>
+          </a:xfrm>
+          <a:prstGeom prst="rect">
+            <a:avLst/>
+          </a:prstGeom>
+        </p:spPr>
+      </p:pic>
     </p:spTree>
     <p:extLst>
       <p:ext uri="{BB962C8B-B14F-4D97-AF65-F5344CB8AC3E}">
-        <p14:creationId xmlns:p14="http://schemas.microsoft.com/office/powerpoint/2010/main" val="1292238976"/>
+        <p14:creationId xmlns:p14="http://schemas.microsoft.com/office/powerpoint/2010/main" val="3317625823"/>
       </p:ext>
     </p:extLst>
   </p:cSld>
@@ -4493,7 +4923,7 @@
           <p:cNvPr id="3" name="Picture 2">
             <a:extLst>
               <a:ext uri="{FF2B5EF4-FFF2-40B4-BE49-F238E27FC236}">
-                <a16:creationId xmlns:a16="http://schemas.microsoft.com/office/drawing/2014/main" id="{779AEE88-EDBF-8A6A-F389-E287E205BC34}"/>
+                <a16:creationId xmlns:a16="http://schemas.microsoft.com/office/drawing/2014/main" id="{84B1BADE-8340-E6A8-2455-701C7A15C923}"/>
               </a:ext>
             </a:extLst>
           </p:cNvPr>
@@ -4516,8 +4946,8 @@
         </p:blipFill>
         <p:spPr>
           <a:xfrm>
-            <a:off x="491684" y="1346086"/>
-            <a:ext cx="5454316" cy="4090737"/>
+            <a:off x="661549" y="2679192"/>
+            <a:ext cx="2712368" cy="2034276"/>
           </a:xfrm>
           <a:prstGeom prst="rect">
             <a:avLst/>
@@ -4529,7 +4959,7 @@
           <p:cNvPr id="5" name="Picture 4">
             <a:extLst>
               <a:ext uri="{FF2B5EF4-FFF2-40B4-BE49-F238E27FC236}">
-                <a16:creationId xmlns:a16="http://schemas.microsoft.com/office/drawing/2014/main" id="{AA1E0DC7-8770-8983-B7A3-700FD119F862}"/>
+                <a16:creationId xmlns:a16="http://schemas.microsoft.com/office/drawing/2014/main" id="{E38783BE-698C-5996-471D-32C46269E5A6}"/>
               </a:ext>
             </a:extLst>
           </p:cNvPr>
@@ -4552,8 +4982,584 @@
         </p:blipFill>
         <p:spPr>
           <a:xfrm>
-            <a:off x="6246002" y="1346086"/>
-            <a:ext cx="5454316" cy="4090737"/>
+            <a:off x="661549" y="588912"/>
+            <a:ext cx="2712368" cy="2034276"/>
+          </a:xfrm>
+          <a:prstGeom prst="rect">
+            <a:avLst/>
+          </a:prstGeom>
+        </p:spPr>
+      </p:pic>
+      <p:pic>
+        <p:nvPicPr>
+          <p:cNvPr id="7" name="Picture 6">
+            <a:extLst>
+              <a:ext uri="{FF2B5EF4-FFF2-40B4-BE49-F238E27FC236}">
+                <a16:creationId xmlns:a16="http://schemas.microsoft.com/office/drawing/2014/main" id="{97D48406-6243-4F5E-A687-7170DB6158C4}"/>
+              </a:ext>
+            </a:extLst>
+          </p:cNvPr>
+          <p:cNvPicPr>
+            <a:picLocks noChangeAspect="1"/>
+          </p:cNvPicPr>
+          <p:nvPr/>
+        </p:nvPicPr>
+        <p:blipFill>
+          <a:blip r:embed="rId4">
+            <a:extLst>
+              <a:ext uri="{28A0092B-C50C-407E-A947-70E740481C1C}">
+                <a14:useLocalDpi xmlns:a14="http://schemas.microsoft.com/office/drawing/2010/main" val="0"/>
+              </a:ext>
+            </a:extLst>
+          </a:blip>
+          <a:stretch>
+            <a:fillRect/>
+          </a:stretch>
+        </p:blipFill>
+        <p:spPr>
+          <a:xfrm>
+            <a:off x="4610276" y="2679192"/>
+            <a:ext cx="2712368" cy="2034276"/>
+          </a:xfrm>
+          <a:prstGeom prst="rect">
+            <a:avLst/>
+          </a:prstGeom>
+        </p:spPr>
+      </p:pic>
+      <p:pic>
+        <p:nvPicPr>
+          <p:cNvPr id="9" name="Picture 8">
+            <a:extLst>
+              <a:ext uri="{FF2B5EF4-FFF2-40B4-BE49-F238E27FC236}">
+                <a16:creationId xmlns:a16="http://schemas.microsoft.com/office/drawing/2014/main" id="{73636A4E-23F2-C199-BDA3-19F41DADEE8E}"/>
+              </a:ext>
+            </a:extLst>
+          </p:cNvPr>
+          <p:cNvPicPr>
+            <a:picLocks noChangeAspect="1"/>
+          </p:cNvPicPr>
+          <p:nvPr/>
+        </p:nvPicPr>
+        <p:blipFill>
+          <a:blip r:embed="rId5">
+            <a:extLst>
+              <a:ext uri="{28A0092B-C50C-407E-A947-70E740481C1C}">
+                <a14:useLocalDpi xmlns:a14="http://schemas.microsoft.com/office/drawing/2010/main" val="0"/>
+              </a:ext>
+            </a:extLst>
+          </a:blip>
+          <a:stretch>
+            <a:fillRect/>
+          </a:stretch>
+        </p:blipFill>
+        <p:spPr>
+          <a:xfrm>
+            <a:off x="4533728" y="588912"/>
+            <a:ext cx="2712368" cy="2034276"/>
+          </a:xfrm>
+          <a:prstGeom prst="rect">
+            <a:avLst/>
+          </a:prstGeom>
+        </p:spPr>
+      </p:pic>
+      <p:pic>
+        <p:nvPicPr>
+          <p:cNvPr id="11" name="Picture 10">
+            <a:extLst>
+              <a:ext uri="{FF2B5EF4-FFF2-40B4-BE49-F238E27FC236}">
+                <a16:creationId xmlns:a16="http://schemas.microsoft.com/office/drawing/2014/main" id="{09A465B0-E260-561D-DECA-39A6B56C714D}"/>
+              </a:ext>
+            </a:extLst>
+          </p:cNvPr>
+          <p:cNvPicPr>
+            <a:picLocks noChangeAspect="1"/>
+          </p:cNvPicPr>
+          <p:nvPr/>
+        </p:nvPicPr>
+        <p:blipFill>
+          <a:blip r:embed="rId6">
+            <a:extLst>
+              <a:ext uri="{28A0092B-C50C-407E-A947-70E740481C1C}">
+                <a14:useLocalDpi xmlns:a14="http://schemas.microsoft.com/office/drawing/2010/main" val="0"/>
+              </a:ext>
+            </a:extLst>
+          </a:blip>
+          <a:stretch>
+            <a:fillRect/>
+          </a:stretch>
+        </p:blipFill>
+        <p:spPr>
+          <a:xfrm>
+            <a:off x="8598760" y="2679192"/>
+            <a:ext cx="2712368" cy="2034276"/>
+          </a:xfrm>
+          <a:prstGeom prst="rect">
+            <a:avLst/>
+          </a:prstGeom>
+        </p:spPr>
+      </p:pic>
+      <p:pic>
+        <p:nvPicPr>
+          <p:cNvPr id="13" name="Picture 12">
+            <a:extLst>
+              <a:ext uri="{FF2B5EF4-FFF2-40B4-BE49-F238E27FC236}">
+                <a16:creationId xmlns:a16="http://schemas.microsoft.com/office/drawing/2014/main" id="{60E33847-42EB-58D0-6CA8-3CF61ACBA69F}"/>
+              </a:ext>
+            </a:extLst>
+          </p:cNvPr>
+          <p:cNvPicPr>
+            <a:picLocks noChangeAspect="1"/>
+          </p:cNvPicPr>
+          <p:nvPr/>
+        </p:nvPicPr>
+        <p:blipFill>
+          <a:blip r:embed="rId7">
+            <a:extLst>
+              <a:ext uri="{28A0092B-C50C-407E-A947-70E740481C1C}">
+                <a14:useLocalDpi xmlns:a14="http://schemas.microsoft.com/office/drawing/2010/main" val="0"/>
+              </a:ext>
+            </a:extLst>
+          </a:blip>
+          <a:stretch>
+            <a:fillRect/>
+          </a:stretch>
+        </p:blipFill>
+        <p:spPr>
+          <a:xfrm>
+            <a:off x="8598760" y="588912"/>
+            <a:ext cx="2712368" cy="2034276"/>
+          </a:xfrm>
+          <a:prstGeom prst="rect">
+            <a:avLst/>
+          </a:prstGeom>
+        </p:spPr>
+      </p:pic>
+      <p:sp>
+        <p:nvSpPr>
+          <p:cNvPr id="14" name="TextBox 13">
+            <a:extLst>
+              <a:ext uri="{FF2B5EF4-FFF2-40B4-BE49-F238E27FC236}">
+                <a16:creationId xmlns:a16="http://schemas.microsoft.com/office/drawing/2014/main" id="{A8D76BC5-4028-50C4-0286-5B39CFC1FE8B}"/>
+              </a:ext>
+            </a:extLst>
+          </p:cNvPr>
+          <p:cNvSpPr txBox="1"/>
+          <p:nvPr/>
+        </p:nvSpPr>
+        <p:spPr>
+          <a:xfrm>
+            <a:off x="786384" y="307098"/>
+            <a:ext cx="2642616" cy="369332"/>
+          </a:xfrm>
+          <a:prstGeom prst="rect">
+            <a:avLst/>
+          </a:prstGeom>
+          <a:noFill/>
+        </p:spPr>
+        <p:txBody>
+          <a:bodyPr wrap="square" rtlCol="0">
+            <a:spAutoFit/>
+          </a:bodyPr>
+          <a:lstStyle/>
+          <a:p>
+            <a:r>
+              <a:rPr lang="en-US" dirty="0">
+                <a:latin typeface="Times New Roman" panose="02020603050405020304" pitchFamily="18" charset="0"/>
+                <a:cs typeface="Times New Roman" panose="02020603050405020304" pitchFamily="18" charset="0"/>
+              </a:rPr>
+              <a:t>Counts : 100k (@1mW) </a:t>
+            </a:r>
+          </a:p>
+        </p:txBody>
+      </p:sp>
+      <p:sp>
+        <p:nvSpPr>
+          <p:cNvPr id="15" name="TextBox 14">
+            <a:extLst>
+              <a:ext uri="{FF2B5EF4-FFF2-40B4-BE49-F238E27FC236}">
+                <a16:creationId xmlns:a16="http://schemas.microsoft.com/office/drawing/2014/main" id="{4469BC6B-1C4A-AA8C-F769-EE6278D7E9DD}"/>
+              </a:ext>
+            </a:extLst>
+          </p:cNvPr>
+          <p:cNvSpPr txBox="1"/>
+          <p:nvPr/>
+        </p:nvSpPr>
+        <p:spPr>
+          <a:xfrm>
+            <a:off x="4683252" y="274832"/>
+            <a:ext cx="2642616" cy="369332"/>
+          </a:xfrm>
+          <a:prstGeom prst="rect">
+            <a:avLst/>
+          </a:prstGeom>
+          <a:noFill/>
+        </p:spPr>
+        <p:txBody>
+          <a:bodyPr wrap="square" rtlCol="0">
+            <a:spAutoFit/>
+          </a:bodyPr>
+          <a:lstStyle/>
+          <a:p>
+            <a:r>
+              <a:rPr lang="en-US" dirty="0">
+                <a:latin typeface="Times New Roman" panose="02020603050405020304" pitchFamily="18" charset="0"/>
+                <a:cs typeface="Times New Roman" panose="02020603050405020304" pitchFamily="18" charset="0"/>
+              </a:rPr>
+              <a:t>Counts : 60k (@1mW) </a:t>
+            </a:r>
+          </a:p>
+        </p:txBody>
+      </p:sp>
+      <p:sp>
+        <p:nvSpPr>
+          <p:cNvPr id="16" name="TextBox 15">
+            <a:extLst>
+              <a:ext uri="{FF2B5EF4-FFF2-40B4-BE49-F238E27FC236}">
+                <a16:creationId xmlns:a16="http://schemas.microsoft.com/office/drawing/2014/main" id="{94F15E2C-03F3-3EB6-B50E-420DB7A4336E}"/>
+              </a:ext>
+            </a:extLst>
+          </p:cNvPr>
+          <p:cNvSpPr txBox="1"/>
+          <p:nvPr/>
+        </p:nvSpPr>
+        <p:spPr>
+          <a:xfrm>
+            <a:off x="8580120" y="274832"/>
+            <a:ext cx="2642616" cy="369332"/>
+          </a:xfrm>
+          <a:prstGeom prst="rect">
+            <a:avLst/>
+          </a:prstGeom>
+          <a:noFill/>
+        </p:spPr>
+        <p:txBody>
+          <a:bodyPr wrap="square" rtlCol="0">
+            <a:spAutoFit/>
+          </a:bodyPr>
+          <a:lstStyle/>
+          <a:p>
+            <a:r>
+              <a:rPr lang="en-US" dirty="0">
+                <a:latin typeface="Times New Roman" panose="02020603050405020304" pitchFamily="18" charset="0"/>
+                <a:cs typeface="Times New Roman" panose="02020603050405020304" pitchFamily="18" charset="0"/>
+              </a:rPr>
+              <a:t>Counts : 16k (@1mW) </a:t>
+            </a:r>
+          </a:p>
+        </p:txBody>
+      </p:sp>
+      <p:pic>
+        <p:nvPicPr>
+          <p:cNvPr id="22" name="Picture 21">
+            <a:extLst>
+              <a:ext uri="{FF2B5EF4-FFF2-40B4-BE49-F238E27FC236}">
+                <a16:creationId xmlns:a16="http://schemas.microsoft.com/office/drawing/2014/main" id="{A1A113AE-CCCD-369D-BDE7-25F65CC25B42}"/>
+              </a:ext>
+            </a:extLst>
+          </p:cNvPr>
+          <p:cNvPicPr>
+            <a:picLocks noChangeAspect="1"/>
+          </p:cNvPicPr>
+          <p:nvPr/>
+        </p:nvPicPr>
+        <p:blipFill>
+          <a:blip r:embed="rId8">
+            <a:extLst>
+              <a:ext uri="{28A0092B-C50C-407E-A947-70E740481C1C}">
+                <a14:useLocalDpi xmlns:a14="http://schemas.microsoft.com/office/drawing/2010/main" val="0"/>
+              </a:ext>
+            </a:extLst>
+          </a:blip>
+          <a:stretch>
+            <a:fillRect/>
+          </a:stretch>
+        </p:blipFill>
+        <p:spPr>
+          <a:xfrm>
+            <a:off x="5835382" y="5065986"/>
+            <a:ext cx="1740408" cy="1305306"/>
+          </a:xfrm>
+          <a:prstGeom prst="rect">
+            <a:avLst/>
+          </a:prstGeom>
+        </p:spPr>
+      </p:pic>
+      <p:pic>
+        <p:nvPicPr>
+          <p:cNvPr id="24" name="Picture 23">
+            <a:extLst>
+              <a:ext uri="{FF2B5EF4-FFF2-40B4-BE49-F238E27FC236}">
+                <a16:creationId xmlns:a16="http://schemas.microsoft.com/office/drawing/2014/main" id="{EF165731-39EF-ACB3-D0A2-D749C848EB18}"/>
+              </a:ext>
+            </a:extLst>
+          </p:cNvPr>
+          <p:cNvPicPr>
+            <a:picLocks noChangeAspect="1"/>
+          </p:cNvPicPr>
+          <p:nvPr/>
+        </p:nvPicPr>
+        <p:blipFill>
+          <a:blip r:embed="rId9">
+            <a:extLst>
+              <a:ext uri="{28A0092B-C50C-407E-A947-70E740481C1C}">
+                <a14:useLocalDpi xmlns:a14="http://schemas.microsoft.com/office/drawing/2010/main" val="0"/>
+              </a:ext>
+            </a:extLst>
+          </a:blip>
+          <a:stretch>
+            <a:fillRect/>
+          </a:stretch>
+        </p:blipFill>
+        <p:spPr>
+          <a:xfrm>
+            <a:off x="4069408" y="5051202"/>
+            <a:ext cx="1740408" cy="1305306"/>
+          </a:xfrm>
+          <a:prstGeom prst="rect">
+            <a:avLst/>
+          </a:prstGeom>
+        </p:spPr>
+      </p:pic>
+      <p:pic>
+        <p:nvPicPr>
+          <p:cNvPr id="30" name="Picture 29">
+            <a:extLst>
+              <a:ext uri="{FF2B5EF4-FFF2-40B4-BE49-F238E27FC236}">
+                <a16:creationId xmlns:a16="http://schemas.microsoft.com/office/drawing/2014/main" id="{8045AB33-443A-BF7B-5416-598BBC5076E6}"/>
+              </a:ext>
+            </a:extLst>
+          </p:cNvPr>
+          <p:cNvPicPr>
+            <a:picLocks noChangeAspect="1"/>
+          </p:cNvPicPr>
+          <p:nvPr/>
+        </p:nvPicPr>
+        <p:blipFill>
+          <a:blip r:embed="rId10">
+            <a:extLst>
+              <a:ext uri="{28A0092B-C50C-407E-A947-70E740481C1C}">
+                <a14:useLocalDpi xmlns:a14="http://schemas.microsoft.com/office/drawing/2010/main" val="0"/>
+              </a:ext>
+            </a:extLst>
+          </a:blip>
+          <a:stretch>
+            <a:fillRect/>
+          </a:stretch>
+        </p:blipFill>
+        <p:spPr>
+          <a:xfrm>
+            <a:off x="1857993" y="5020131"/>
+            <a:ext cx="1740408" cy="1305306"/>
+          </a:xfrm>
+          <a:prstGeom prst="rect">
+            <a:avLst/>
+          </a:prstGeom>
+        </p:spPr>
+      </p:pic>
+      <p:pic>
+        <p:nvPicPr>
+          <p:cNvPr id="32" name="Picture 31">
+            <a:extLst>
+              <a:ext uri="{FF2B5EF4-FFF2-40B4-BE49-F238E27FC236}">
+                <a16:creationId xmlns:a16="http://schemas.microsoft.com/office/drawing/2014/main" id="{A4461DF8-6E14-198B-561A-6AC4DDB50333}"/>
+              </a:ext>
+            </a:extLst>
+          </p:cNvPr>
+          <p:cNvPicPr>
+            <a:picLocks noChangeAspect="1"/>
+          </p:cNvPicPr>
+          <p:nvPr/>
+        </p:nvPicPr>
+        <p:blipFill>
+          <a:blip r:embed="rId11">
+            <a:extLst>
+              <a:ext uri="{28A0092B-C50C-407E-A947-70E740481C1C}">
+                <a14:useLocalDpi xmlns:a14="http://schemas.microsoft.com/office/drawing/2010/main" val="0"/>
+              </a:ext>
+            </a:extLst>
+          </a:blip>
+          <a:stretch>
+            <a:fillRect/>
+          </a:stretch>
+        </p:blipFill>
+        <p:spPr>
+          <a:xfrm>
+            <a:off x="117585" y="5020131"/>
+            <a:ext cx="1740408" cy="1305306"/>
+          </a:xfrm>
+          <a:prstGeom prst="rect">
+            <a:avLst/>
+          </a:prstGeom>
+        </p:spPr>
+      </p:pic>
+      <p:pic>
+        <p:nvPicPr>
+          <p:cNvPr id="34" name="Picture 33">
+            <a:extLst>
+              <a:ext uri="{FF2B5EF4-FFF2-40B4-BE49-F238E27FC236}">
+                <a16:creationId xmlns:a16="http://schemas.microsoft.com/office/drawing/2014/main" id="{BEA1E7C8-4BF2-4BEB-8478-47B44D3F1B8B}"/>
+              </a:ext>
+            </a:extLst>
+          </p:cNvPr>
+          <p:cNvPicPr>
+            <a:picLocks noChangeAspect="1"/>
+          </p:cNvPicPr>
+          <p:nvPr/>
+        </p:nvPicPr>
+        <p:blipFill>
+          <a:blip r:embed="rId12">
+            <a:extLst>
+              <a:ext uri="{28A0092B-C50C-407E-A947-70E740481C1C}">
+                <a14:useLocalDpi xmlns:a14="http://schemas.microsoft.com/office/drawing/2010/main" val="0"/>
+              </a:ext>
+            </a:extLst>
+          </a:blip>
+          <a:stretch>
+            <a:fillRect/>
+          </a:stretch>
+        </p:blipFill>
+        <p:spPr>
+          <a:xfrm>
+            <a:off x="9954944" y="5020131"/>
+            <a:ext cx="1740408" cy="1305306"/>
+          </a:xfrm>
+          <a:prstGeom prst="rect">
+            <a:avLst/>
+          </a:prstGeom>
+        </p:spPr>
+      </p:pic>
+      <p:pic>
+        <p:nvPicPr>
+          <p:cNvPr id="36" name="Picture 35">
+            <a:extLst>
+              <a:ext uri="{FF2B5EF4-FFF2-40B4-BE49-F238E27FC236}">
+                <a16:creationId xmlns:a16="http://schemas.microsoft.com/office/drawing/2014/main" id="{69C9FD1E-6FA3-32E5-C417-948A1B724F53}"/>
+              </a:ext>
+            </a:extLst>
+          </p:cNvPr>
+          <p:cNvPicPr>
+            <a:picLocks noChangeAspect="1"/>
+          </p:cNvPicPr>
+          <p:nvPr/>
+        </p:nvPicPr>
+        <p:blipFill>
+          <a:blip r:embed="rId13">
+            <a:extLst>
+              <a:ext uri="{28A0092B-C50C-407E-A947-70E740481C1C}">
+                <a14:useLocalDpi xmlns:a14="http://schemas.microsoft.com/office/drawing/2010/main" val="0"/>
+              </a:ext>
+            </a:extLst>
+          </a:blip>
+          <a:stretch>
+            <a:fillRect/>
+          </a:stretch>
+        </p:blipFill>
+        <p:spPr>
+          <a:xfrm>
+            <a:off x="8161020" y="5065986"/>
+            <a:ext cx="1740408" cy="1305306"/>
+          </a:xfrm>
+          <a:prstGeom prst="rect">
+            <a:avLst/>
+          </a:prstGeom>
+        </p:spPr>
+      </p:pic>
+    </p:spTree>
+    <p:extLst>
+      <p:ext uri="{BB962C8B-B14F-4D97-AF65-F5344CB8AC3E}">
+        <p14:creationId xmlns:p14="http://schemas.microsoft.com/office/powerpoint/2010/main" val="1292238976"/>
+      </p:ext>
+    </p:extLst>
+  </p:cSld>
+  <p:clrMapOvr>
+    <a:masterClrMapping/>
+  </p:clrMapOvr>
+</p:sld>
+</file>
+
+<file path=ppt/slides/slide5.xml><?xml version="1.0" encoding="utf-8"?>
+<p:sld xmlns:a="http://schemas.openxmlformats.org/drawingml/2006/main" xmlns:r="http://schemas.openxmlformats.org/officeDocument/2006/relationships" xmlns:p="http://schemas.openxmlformats.org/presentationml/2006/main">
+  <p:cSld>
+    <p:spTree>
+      <p:nvGrpSpPr>
+        <p:cNvPr id="1" name=""/>
+        <p:cNvGrpSpPr/>
+        <p:nvPr/>
+      </p:nvGrpSpPr>
+      <p:grpSpPr>
+        <a:xfrm>
+          <a:off x="0" y="0"/>
+          <a:ext cx="0" cy="0"/>
+          <a:chOff x="0" y="0"/>
+          <a:chExt cx="0" cy="0"/>
+        </a:xfrm>
+      </p:grpSpPr>
+      <p:pic>
+        <p:nvPicPr>
+          <p:cNvPr id="3" name="Picture 2">
+            <a:extLst>
+              <a:ext uri="{FF2B5EF4-FFF2-40B4-BE49-F238E27FC236}">
+                <a16:creationId xmlns:a16="http://schemas.microsoft.com/office/drawing/2014/main" id="{779AEE88-EDBF-8A6A-F389-E287E205BC34}"/>
+              </a:ext>
+            </a:extLst>
+          </p:cNvPr>
+          <p:cNvPicPr>
+            <a:picLocks noChangeAspect="1"/>
+          </p:cNvPicPr>
+          <p:nvPr/>
+        </p:nvPicPr>
+        <p:blipFill>
+          <a:blip r:embed="rId2">
+            <a:extLst>
+              <a:ext uri="{28A0092B-C50C-407E-A947-70E740481C1C}">
+                <a14:useLocalDpi xmlns:a14="http://schemas.microsoft.com/office/drawing/2010/main" val="0"/>
+              </a:ext>
+            </a:extLst>
+          </a:blip>
+          <a:stretch>
+            <a:fillRect/>
+          </a:stretch>
+        </p:blipFill>
+        <p:spPr>
+          <a:xfrm>
+            <a:off x="1848535" y="748030"/>
+            <a:ext cx="4423139" cy="3317354"/>
+          </a:xfrm>
+          <a:prstGeom prst="rect">
+            <a:avLst/>
+          </a:prstGeom>
+        </p:spPr>
+      </p:pic>
+      <p:pic>
+        <p:nvPicPr>
+          <p:cNvPr id="5" name="Picture 4">
+            <a:extLst>
+              <a:ext uri="{FF2B5EF4-FFF2-40B4-BE49-F238E27FC236}">
+                <a16:creationId xmlns:a16="http://schemas.microsoft.com/office/drawing/2014/main" id="{AA1E0DC7-8770-8983-B7A3-700FD119F862}"/>
+              </a:ext>
+            </a:extLst>
+          </p:cNvPr>
+          <p:cNvPicPr>
+            <a:picLocks noChangeAspect="1"/>
+          </p:cNvPicPr>
+          <p:nvPr/>
+        </p:nvPicPr>
+        <p:blipFill>
+          <a:blip r:embed="rId3">
+            <a:extLst>
+              <a:ext uri="{28A0092B-C50C-407E-A947-70E740481C1C}">
+                <a14:useLocalDpi xmlns:a14="http://schemas.microsoft.com/office/drawing/2010/main" val="0"/>
+              </a:ext>
+            </a:extLst>
+          </a:blip>
+          <a:stretch>
+            <a:fillRect/>
+          </a:stretch>
+        </p:blipFill>
+        <p:spPr>
+          <a:xfrm>
+            <a:off x="7602853" y="748030"/>
+            <a:ext cx="4423139" cy="3317354"/>
           </a:xfrm>
           <a:prstGeom prst="rect">
             <a:avLst/>
@@ -4598,10 +5604,658 @@
           </a:p>
         </p:txBody>
       </p:sp>
+      <p:pic>
+        <p:nvPicPr>
+          <p:cNvPr id="8" name="Picture 7">
+            <a:extLst>
+              <a:ext uri="{FF2B5EF4-FFF2-40B4-BE49-F238E27FC236}">
+                <a16:creationId xmlns:a16="http://schemas.microsoft.com/office/drawing/2014/main" id="{B2862887-C3D6-2718-6637-B34E0BC3DE4F}"/>
+              </a:ext>
+            </a:extLst>
+          </p:cNvPr>
+          <p:cNvPicPr>
+            <a:picLocks noChangeAspect="1"/>
+          </p:cNvPicPr>
+          <p:nvPr/>
+        </p:nvPicPr>
+        <p:blipFill>
+          <a:blip r:embed="rId4">
+            <a:extLst>
+              <a:ext uri="{28A0092B-C50C-407E-A947-70E740481C1C}">
+                <a14:useLocalDpi xmlns:a14="http://schemas.microsoft.com/office/drawing/2010/main" val="0"/>
+              </a:ext>
+            </a:extLst>
+          </a:blip>
+          <a:stretch>
+            <a:fillRect/>
+          </a:stretch>
+        </p:blipFill>
+        <p:spPr>
+          <a:xfrm>
+            <a:off x="2670048" y="4283452"/>
+            <a:ext cx="3066288" cy="2299716"/>
+          </a:xfrm>
+          <a:prstGeom prst="rect">
+            <a:avLst/>
+          </a:prstGeom>
+        </p:spPr>
+      </p:pic>
+      <p:pic>
+        <p:nvPicPr>
+          <p:cNvPr id="10" name="Picture 9">
+            <a:extLst>
+              <a:ext uri="{FF2B5EF4-FFF2-40B4-BE49-F238E27FC236}">
+                <a16:creationId xmlns:a16="http://schemas.microsoft.com/office/drawing/2014/main" id="{8A33D71C-1F40-617C-B4A1-CD91905ACB68}"/>
+              </a:ext>
+            </a:extLst>
+          </p:cNvPr>
+          <p:cNvPicPr>
+            <a:picLocks noChangeAspect="1"/>
+          </p:cNvPicPr>
+          <p:nvPr/>
+        </p:nvPicPr>
+        <p:blipFill>
+          <a:blip r:embed="rId5">
+            <a:extLst>
+              <a:ext uri="{28A0092B-C50C-407E-A947-70E740481C1C}">
+                <a14:useLocalDpi xmlns:a14="http://schemas.microsoft.com/office/drawing/2010/main" val="0"/>
+              </a:ext>
+            </a:extLst>
+          </a:blip>
+          <a:stretch>
+            <a:fillRect/>
+          </a:stretch>
+        </p:blipFill>
+        <p:spPr>
+          <a:xfrm>
+            <a:off x="6271674" y="4283452"/>
+            <a:ext cx="3066288" cy="2299716"/>
+          </a:xfrm>
+          <a:prstGeom prst="rect">
+            <a:avLst/>
+          </a:prstGeom>
+        </p:spPr>
+      </p:pic>
     </p:spTree>
     <p:extLst>
       <p:ext uri="{BB962C8B-B14F-4D97-AF65-F5344CB8AC3E}">
         <p14:creationId xmlns:p14="http://schemas.microsoft.com/office/powerpoint/2010/main" val="2073386862"/>
+      </p:ext>
+    </p:extLst>
+  </p:cSld>
+  <p:clrMapOvr>
+    <a:masterClrMapping/>
+  </p:clrMapOvr>
+</p:sld>
+</file>
+
+<file path=ppt/slides/slide6.xml><?xml version="1.0" encoding="utf-8"?>
+<p:sld xmlns:a="http://schemas.openxmlformats.org/drawingml/2006/main" xmlns:r="http://schemas.openxmlformats.org/officeDocument/2006/relationships" xmlns:p="http://schemas.openxmlformats.org/presentationml/2006/main">
+  <p:cSld>
+    <p:spTree>
+      <p:nvGrpSpPr>
+        <p:cNvPr id="1" name=""/>
+        <p:cNvGrpSpPr/>
+        <p:nvPr/>
+      </p:nvGrpSpPr>
+      <p:grpSpPr>
+        <a:xfrm>
+          <a:off x="0" y="0"/>
+          <a:ext cx="0" cy="0"/>
+          <a:chOff x="0" y="0"/>
+          <a:chExt cx="0" cy="0"/>
+        </a:xfrm>
+      </p:grpSpPr>
+      <p:pic>
+        <p:nvPicPr>
+          <p:cNvPr id="2" name="Picture 1">
+            <a:extLst>
+              <a:ext uri="{FF2B5EF4-FFF2-40B4-BE49-F238E27FC236}">
+                <a16:creationId xmlns:a16="http://schemas.microsoft.com/office/drawing/2014/main" id="{CFF17C68-0085-367E-677D-A9926FD98733}"/>
+              </a:ext>
+            </a:extLst>
+          </p:cNvPr>
+          <p:cNvPicPr>
+            <a:picLocks noChangeAspect="1"/>
+          </p:cNvPicPr>
+          <p:nvPr/>
+        </p:nvPicPr>
+        <p:blipFill>
+          <a:blip r:embed="rId2">
+            <a:extLst>
+              <a:ext uri="{28A0092B-C50C-407E-A947-70E740481C1C}">
+                <a14:useLocalDpi xmlns:a14="http://schemas.microsoft.com/office/drawing/2010/main" val="0"/>
+              </a:ext>
+            </a:extLst>
+          </a:blip>
+          <a:stretch>
+            <a:fillRect/>
+          </a:stretch>
+        </p:blipFill>
+        <p:spPr>
+          <a:xfrm>
+            <a:off x="976412" y="2796168"/>
+            <a:ext cx="2800920" cy="2100690"/>
+          </a:xfrm>
+          <a:prstGeom prst="rect">
+            <a:avLst/>
+          </a:prstGeom>
+        </p:spPr>
+      </p:pic>
+      <p:pic>
+        <p:nvPicPr>
+          <p:cNvPr id="3" name="Picture 2">
+            <a:extLst>
+              <a:ext uri="{FF2B5EF4-FFF2-40B4-BE49-F238E27FC236}">
+                <a16:creationId xmlns:a16="http://schemas.microsoft.com/office/drawing/2014/main" id="{5EDF68E8-8DE5-1FE3-D68D-98D32BF00749}"/>
+              </a:ext>
+            </a:extLst>
+          </p:cNvPr>
+          <p:cNvPicPr>
+            <a:picLocks noChangeAspect="1"/>
+          </p:cNvPicPr>
+          <p:nvPr/>
+        </p:nvPicPr>
+        <p:blipFill>
+          <a:blip r:embed="rId3">
+            <a:extLst>
+              <a:ext uri="{28A0092B-C50C-407E-A947-70E740481C1C}">
+                <a14:useLocalDpi xmlns:a14="http://schemas.microsoft.com/office/drawing/2010/main" val="0"/>
+              </a:ext>
+            </a:extLst>
+          </a:blip>
+          <a:stretch>
+            <a:fillRect/>
+          </a:stretch>
+        </p:blipFill>
+        <p:spPr>
+          <a:xfrm>
+            <a:off x="1093968" y="667286"/>
+            <a:ext cx="2800920" cy="2100690"/>
+          </a:xfrm>
+          <a:prstGeom prst="rect">
+            <a:avLst/>
+          </a:prstGeom>
+        </p:spPr>
+      </p:pic>
+      <p:sp>
+        <p:nvSpPr>
+          <p:cNvPr id="4" name="TextBox 3">
+            <a:extLst>
+              <a:ext uri="{FF2B5EF4-FFF2-40B4-BE49-F238E27FC236}">
+                <a16:creationId xmlns:a16="http://schemas.microsoft.com/office/drawing/2014/main" id="{5583296B-7038-9C89-415F-E0212B76776D}"/>
+              </a:ext>
+            </a:extLst>
+          </p:cNvPr>
+          <p:cNvSpPr txBox="1"/>
+          <p:nvPr/>
+        </p:nvSpPr>
+        <p:spPr>
+          <a:xfrm>
+            <a:off x="1252272" y="283858"/>
+            <a:ext cx="2642616" cy="369332"/>
+          </a:xfrm>
+          <a:prstGeom prst="rect">
+            <a:avLst/>
+          </a:prstGeom>
+          <a:noFill/>
+        </p:spPr>
+        <p:txBody>
+          <a:bodyPr wrap="square" rtlCol="0">
+            <a:spAutoFit/>
+          </a:bodyPr>
+          <a:lstStyle/>
+          <a:p>
+            <a:r>
+              <a:rPr lang="en-US" dirty="0">
+                <a:latin typeface="Times New Roman" panose="02020603050405020304" pitchFamily="18" charset="0"/>
+                <a:cs typeface="Times New Roman" panose="02020603050405020304" pitchFamily="18" charset="0"/>
+              </a:rPr>
+              <a:t>Counts : 60k (@1mW) </a:t>
+            </a:r>
+          </a:p>
+        </p:txBody>
+      </p:sp>
+      <p:pic>
+        <p:nvPicPr>
+          <p:cNvPr id="5" name="Picture 4">
+            <a:extLst>
+              <a:ext uri="{FF2B5EF4-FFF2-40B4-BE49-F238E27FC236}">
+                <a16:creationId xmlns:a16="http://schemas.microsoft.com/office/drawing/2014/main" id="{77CF8D8C-4D9B-D2DD-B7C5-F5F4C499072E}"/>
+              </a:ext>
+            </a:extLst>
+          </p:cNvPr>
+          <p:cNvPicPr>
+            <a:picLocks noChangeAspect="1"/>
+          </p:cNvPicPr>
+          <p:nvPr/>
+        </p:nvPicPr>
+        <p:blipFill>
+          <a:blip r:embed="rId4">
+            <a:extLst>
+              <a:ext uri="{28A0092B-C50C-407E-A947-70E740481C1C}">
+                <a14:useLocalDpi xmlns:a14="http://schemas.microsoft.com/office/drawing/2010/main" val="0"/>
+              </a:ext>
+            </a:extLst>
+          </a:blip>
+          <a:stretch>
+            <a:fillRect/>
+          </a:stretch>
+        </p:blipFill>
+        <p:spPr>
+          <a:xfrm>
+            <a:off x="2106510" y="5176612"/>
+            <a:ext cx="1749552" cy="1312164"/>
+          </a:xfrm>
+          <a:prstGeom prst="rect">
+            <a:avLst/>
+          </a:prstGeom>
+        </p:spPr>
+      </p:pic>
+      <p:pic>
+        <p:nvPicPr>
+          <p:cNvPr id="6" name="Picture 5">
+            <a:extLst>
+              <a:ext uri="{FF2B5EF4-FFF2-40B4-BE49-F238E27FC236}">
+                <a16:creationId xmlns:a16="http://schemas.microsoft.com/office/drawing/2014/main" id="{85A07989-FB5C-E588-DF64-A9C65CA804AB}"/>
+              </a:ext>
+            </a:extLst>
+          </p:cNvPr>
+          <p:cNvPicPr>
+            <a:picLocks noChangeAspect="1"/>
+          </p:cNvPicPr>
+          <p:nvPr/>
+        </p:nvPicPr>
+        <p:blipFill>
+          <a:blip r:embed="rId5">
+            <a:extLst>
+              <a:ext uri="{28A0092B-C50C-407E-A947-70E740481C1C}">
+                <a14:useLocalDpi xmlns:a14="http://schemas.microsoft.com/office/drawing/2010/main" val="0"/>
+              </a:ext>
+            </a:extLst>
+          </a:blip>
+          <a:stretch>
+            <a:fillRect/>
+          </a:stretch>
+        </p:blipFill>
+        <p:spPr>
+          <a:xfrm>
+            <a:off x="219192" y="5090612"/>
+            <a:ext cx="1749552" cy="1312164"/>
+          </a:xfrm>
+          <a:prstGeom prst="rect">
+            <a:avLst/>
+          </a:prstGeom>
+        </p:spPr>
+      </p:pic>
+      <p:pic>
+        <p:nvPicPr>
+          <p:cNvPr id="7" name="Picture 6">
+            <a:extLst>
+              <a:ext uri="{FF2B5EF4-FFF2-40B4-BE49-F238E27FC236}">
+                <a16:creationId xmlns:a16="http://schemas.microsoft.com/office/drawing/2014/main" id="{CEACBEFC-276F-8D8B-915F-231E906E5628}"/>
+              </a:ext>
+            </a:extLst>
+          </p:cNvPr>
+          <p:cNvPicPr>
+            <a:picLocks noChangeAspect="1"/>
+          </p:cNvPicPr>
+          <p:nvPr/>
+        </p:nvPicPr>
+        <p:blipFill>
+          <a:blip r:embed="rId6">
+            <a:extLst>
+              <a:ext uri="{28A0092B-C50C-407E-A947-70E740481C1C}">
+                <a14:useLocalDpi xmlns:a14="http://schemas.microsoft.com/office/drawing/2010/main" val="0"/>
+              </a:ext>
+            </a:extLst>
+          </a:blip>
+          <a:stretch>
+            <a:fillRect/>
+          </a:stretch>
+        </p:blipFill>
+        <p:spPr>
+          <a:xfrm>
+            <a:off x="4860050" y="2796167"/>
+            <a:ext cx="2800921" cy="2100691"/>
+          </a:xfrm>
+          <a:prstGeom prst="rect">
+            <a:avLst/>
+          </a:prstGeom>
+        </p:spPr>
+      </p:pic>
+      <p:pic>
+        <p:nvPicPr>
+          <p:cNvPr id="8" name="Picture 7">
+            <a:extLst>
+              <a:ext uri="{FF2B5EF4-FFF2-40B4-BE49-F238E27FC236}">
+                <a16:creationId xmlns:a16="http://schemas.microsoft.com/office/drawing/2014/main" id="{A4CFC993-0FAC-1DF7-FF77-1B278EC32451}"/>
+              </a:ext>
+            </a:extLst>
+          </p:cNvPr>
+          <p:cNvPicPr>
+            <a:picLocks noChangeAspect="1"/>
+          </p:cNvPicPr>
+          <p:nvPr/>
+        </p:nvPicPr>
+        <p:blipFill>
+          <a:blip r:embed="rId7">
+            <a:extLst>
+              <a:ext uri="{28A0092B-C50C-407E-A947-70E740481C1C}">
+                <a14:useLocalDpi xmlns:a14="http://schemas.microsoft.com/office/drawing/2010/main" val="0"/>
+              </a:ext>
+            </a:extLst>
+          </a:blip>
+          <a:stretch>
+            <a:fillRect/>
+          </a:stretch>
+        </p:blipFill>
+        <p:spPr>
+          <a:xfrm>
+            <a:off x="4860051" y="587656"/>
+            <a:ext cx="2800921" cy="2100691"/>
+          </a:xfrm>
+          <a:prstGeom prst="rect">
+            <a:avLst/>
+          </a:prstGeom>
+        </p:spPr>
+      </p:pic>
+      <p:sp>
+        <p:nvSpPr>
+          <p:cNvPr id="9" name="TextBox 8">
+            <a:extLst>
+              <a:ext uri="{FF2B5EF4-FFF2-40B4-BE49-F238E27FC236}">
+                <a16:creationId xmlns:a16="http://schemas.microsoft.com/office/drawing/2014/main" id="{40A0449B-ABE3-C9C7-1E5C-1C49A5B76A99}"/>
+              </a:ext>
+            </a:extLst>
+          </p:cNvPr>
+          <p:cNvSpPr txBox="1"/>
+          <p:nvPr/>
+        </p:nvSpPr>
+        <p:spPr>
+          <a:xfrm>
+            <a:off x="5018356" y="265688"/>
+            <a:ext cx="2642616" cy="369332"/>
+          </a:xfrm>
+          <a:prstGeom prst="rect">
+            <a:avLst/>
+          </a:prstGeom>
+          <a:noFill/>
+        </p:spPr>
+        <p:txBody>
+          <a:bodyPr wrap="square" rtlCol="0">
+            <a:spAutoFit/>
+          </a:bodyPr>
+          <a:lstStyle/>
+          <a:p>
+            <a:r>
+              <a:rPr lang="en-US" dirty="0">
+                <a:latin typeface="Times New Roman" panose="02020603050405020304" pitchFamily="18" charset="0"/>
+                <a:cs typeface="Times New Roman" panose="02020603050405020304" pitchFamily="18" charset="0"/>
+              </a:rPr>
+              <a:t>Counts : 60k (@1mW) </a:t>
+            </a:r>
+          </a:p>
+        </p:txBody>
+      </p:sp>
+      <p:pic>
+        <p:nvPicPr>
+          <p:cNvPr id="10" name="Picture 9">
+            <a:extLst>
+              <a:ext uri="{FF2B5EF4-FFF2-40B4-BE49-F238E27FC236}">
+                <a16:creationId xmlns:a16="http://schemas.microsoft.com/office/drawing/2014/main" id="{C19F1D9F-099A-C5E2-25F8-2ECA83A2A937}"/>
+              </a:ext>
+            </a:extLst>
+          </p:cNvPr>
+          <p:cNvPicPr>
+            <a:picLocks noChangeAspect="1"/>
+          </p:cNvPicPr>
+          <p:nvPr/>
+        </p:nvPicPr>
+        <p:blipFill>
+          <a:blip r:embed="rId8">
+            <a:extLst>
+              <a:ext uri="{28A0092B-C50C-407E-A947-70E740481C1C}">
+                <a14:useLocalDpi xmlns:a14="http://schemas.microsoft.com/office/drawing/2010/main" val="0"/>
+              </a:ext>
+            </a:extLst>
+          </a:blip>
+          <a:stretch>
+            <a:fillRect/>
+          </a:stretch>
+        </p:blipFill>
+        <p:spPr>
+          <a:xfrm>
+            <a:off x="6173710" y="5249376"/>
+            <a:ext cx="1740408" cy="1305306"/>
+          </a:xfrm>
+          <a:prstGeom prst="rect">
+            <a:avLst/>
+          </a:prstGeom>
+        </p:spPr>
+      </p:pic>
+      <p:pic>
+        <p:nvPicPr>
+          <p:cNvPr id="11" name="Picture 10">
+            <a:extLst>
+              <a:ext uri="{FF2B5EF4-FFF2-40B4-BE49-F238E27FC236}">
+                <a16:creationId xmlns:a16="http://schemas.microsoft.com/office/drawing/2014/main" id="{613BD4EA-96BE-FB73-F02B-D4DDDB4D06DA}"/>
+              </a:ext>
+            </a:extLst>
+          </p:cNvPr>
+          <p:cNvPicPr>
+            <a:picLocks noChangeAspect="1"/>
+          </p:cNvPicPr>
+          <p:nvPr/>
+        </p:nvPicPr>
+        <p:blipFill>
+          <a:blip r:embed="rId9">
+            <a:extLst>
+              <a:ext uri="{28A0092B-C50C-407E-A947-70E740481C1C}">
+                <a14:useLocalDpi xmlns:a14="http://schemas.microsoft.com/office/drawing/2010/main" val="0"/>
+              </a:ext>
+            </a:extLst>
+          </a:blip>
+          <a:stretch>
+            <a:fillRect/>
+          </a:stretch>
+        </p:blipFill>
+        <p:spPr>
+          <a:xfrm>
+            <a:off x="4407736" y="5234592"/>
+            <a:ext cx="1740408" cy="1305306"/>
+          </a:xfrm>
+          <a:prstGeom prst="rect">
+            <a:avLst/>
+          </a:prstGeom>
+        </p:spPr>
+      </p:pic>
+      <p:pic>
+        <p:nvPicPr>
+          <p:cNvPr id="12" name="Picture 11">
+            <a:extLst>
+              <a:ext uri="{FF2B5EF4-FFF2-40B4-BE49-F238E27FC236}">
+                <a16:creationId xmlns:a16="http://schemas.microsoft.com/office/drawing/2014/main" id="{8D9D76CB-77F6-ACA9-29F4-74C0449B5B8C}"/>
+              </a:ext>
+            </a:extLst>
+          </p:cNvPr>
+          <p:cNvPicPr>
+            <a:picLocks noChangeAspect="1"/>
+          </p:cNvPicPr>
+          <p:nvPr/>
+        </p:nvPicPr>
+        <p:blipFill>
+          <a:blip r:embed="rId10">
+            <a:extLst>
+              <a:ext uri="{28A0092B-C50C-407E-A947-70E740481C1C}">
+                <a14:useLocalDpi xmlns:a14="http://schemas.microsoft.com/office/drawing/2010/main" val="0"/>
+              </a:ext>
+            </a:extLst>
+          </a:blip>
+          <a:stretch>
+            <a:fillRect/>
+          </a:stretch>
+        </p:blipFill>
+        <p:spPr>
+          <a:xfrm>
+            <a:off x="9081439" y="2767976"/>
+            <a:ext cx="2800921" cy="2100691"/>
+          </a:xfrm>
+          <a:prstGeom prst="rect">
+            <a:avLst/>
+          </a:prstGeom>
+        </p:spPr>
+      </p:pic>
+      <p:pic>
+        <p:nvPicPr>
+          <p:cNvPr id="13" name="Picture 12">
+            <a:extLst>
+              <a:ext uri="{FF2B5EF4-FFF2-40B4-BE49-F238E27FC236}">
+                <a16:creationId xmlns:a16="http://schemas.microsoft.com/office/drawing/2014/main" id="{B7ED87D5-6880-8FC3-5921-168FB582BBE1}"/>
+              </a:ext>
+            </a:extLst>
+          </p:cNvPr>
+          <p:cNvPicPr>
+            <a:picLocks noChangeAspect="1"/>
+          </p:cNvPicPr>
+          <p:nvPr/>
+        </p:nvPicPr>
+        <p:blipFill>
+          <a:blip r:embed="rId11">
+            <a:extLst>
+              <a:ext uri="{28A0092B-C50C-407E-A947-70E740481C1C}">
+                <a14:useLocalDpi xmlns:a14="http://schemas.microsoft.com/office/drawing/2010/main" val="0"/>
+              </a:ext>
+            </a:extLst>
+          </a:blip>
+          <a:stretch>
+            <a:fillRect/>
+          </a:stretch>
+        </p:blipFill>
+        <p:spPr>
+          <a:xfrm>
+            <a:off x="9081439" y="635020"/>
+            <a:ext cx="2800921" cy="2100691"/>
+          </a:xfrm>
+          <a:prstGeom prst="rect">
+            <a:avLst/>
+          </a:prstGeom>
+        </p:spPr>
+      </p:pic>
+      <p:pic>
+        <p:nvPicPr>
+          <p:cNvPr id="14" name="Picture 13">
+            <a:extLst>
+              <a:ext uri="{FF2B5EF4-FFF2-40B4-BE49-F238E27FC236}">
+                <a16:creationId xmlns:a16="http://schemas.microsoft.com/office/drawing/2014/main" id="{7B513BB5-DDB8-A679-4563-2414BBD53BCC}"/>
+              </a:ext>
+            </a:extLst>
+          </p:cNvPr>
+          <p:cNvPicPr>
+            <a:picLocks noChangeAspect="1"/>
+          </p:cNvPicPr>
+          <p:nvPr/>
+        </p:nvPicPr>
+        <p:blipFill>
+          <a:blip r:embed="rId12">
+            <a:extLst>
+              <a:ext uri="{28A0092B-C50C-407E-A947-70E740481C1C}">
+                <a14:useLocalDpi xmlns:a14="http://schemas.microsoft.com/office/drawing/2010/main" val="0"/>
+              </a:ext>
+            </a:extLst>
+          </a:blip>
+          <a:stretch>
+            <a:fillRect/>
+          </a:stretch>
+        </p:blipFill>
+        <p:spPr>
+          <a:xfrm>
+            <a:off x="8636922" y="5234592"/>
+            <a:ext cx="1740408" cy="1305306"/>
+          </a:xfrm>
+          <a:prstGeom prst="rect">
+            <a:avLst/>
+          </a:prstGeom>
+        </p:spPr>
+      </p:pic>
+      <p:pic>
+        <p:nvPicPr>
+          <p:cNvPr id="15" name="Picture 14">
+            <a:extLst>
+              <a:ext uri="{FF2B5EF4-FFF2-40B4-BE49-F238E27FC236}">
+                <a16:creationId xmlns:a16="http://schemas.microsoft.com/office/drawing/2014/main" id="{74EDCCDC-6E49-28CE-21D7-8F1754D26E2C}"/>
+              </a:ext>
+            </a:extLst>
+          </p:cNvPr>
+          <p:cNvPicPr>
+            <a:picLocks noChangeAspect="1"/>
+          </p:cNvPicPr>
+          <p:nvPr/>
+        </p:nvPicPr>
+        <p:blipFill>
+          <a:blip r:embed="rId13">
+            <a:extLst>
+              <a:ext uri="{28A0092B-C50C-407E-A947-70E740481C1C}">
+                <a14:useLocalDpi xmlns:a14="http://schemas.microsoft.com/office/drawing/2010/main" val="0"/>
+              </a:ext>
+            </a:extLst>
+          </a:blip>
+          <a:stretch>
+            <a:fillRect/>
+          </a:stretch>
+        </p:blipFill>
+        <p:spPr>
+          <a:xfrm>
+            <a:off x="10402896" y="5183470"/>
+            <a:ext cx="1740408" cy="1305306"/>
+          </a:xfrm>
+          <a:prstGeom prst="rect">
+            <a:avLst/>
+          </a:prstGeom>
+        </p:spPr>
+      </p:pic>
+      <p:sp>
+        <p:nvSpPr>
+          <p:cNvPr id="16" name="TextBox 15">
+            <a:extLst>
+              <a:ext uri="{FF2B5EF4-FFF2-40B4-BE49-F238E27FC236}">
+                <a16:creationId xmlns:a16="http://schemas.microsoft.com/office/drawing/2014/main" id="{8B011D4A-0D15-3A36-67B1-EF50E543930F}"/>
+              </a:ext>
+            </a:extLst>
+          </p:cNvPr>
+          <p:cNvSpPr txBox="1"/>
+          <p:nvPr/>
+        </p:nvSpPr>
+        <p:spPr>
+          <a:xfrm>
+            <a:off x="9160591" y="233423"/>
+            <a:ext cx="2642616" cy="369332"/>
+          </a:xfrm>
+          <a:prstGeom prst="rect">
+            <a:avLst/>
+          </a:prstGeom>
+          <a:noFill/>
+        </p:spPr>
+        <p:txBody>
+          <a:bodyPr wrap="square" rtlCol="0">
+            <a:spAutoFit/>
+          </a:bodyPr>
+          <a:lstStyle/>
+          <a:p>
+            <a:r>
+              <a:rPr lang="en-US" dirty="0">
+                <a:latin typeface="Times New Roman" panose="02020603050405020304" pitchFamily="18" charset="0"/>
+                <a:cs typeface="Times New Roman" panose="02020603050405020304" pitchFamily="18" charset="0"/>
+              </a:rPr>
+              <a:t>Counts : 33k (@1mW) </a:t>
+            </a:r>
+          </a:p>
+        </p:txBody>
+      </p:sp>
+    </p:spTree>
+    <p:extLst>
+      <p:ext uri="{BB962C8B-B14F-4D97-AF65-F5344CB8AC3E}">
+        <p14:creationId xmlns:p14="http://schemas.microsoft.com/office/powerpoint/2010/main" val="2366122487"/>
       </p:ext>
     </p:extLst>
   </p:cSld>

--- a/codes/data/2025/Oct_10/statistics.pptx
+++ b/codes/data/2025/Oct_10/statistics.pptx
@@ -5708,10 +5708,10 @@
       </p:grpSpPr>
       <p:pic>
         <p:nvPicPr>
-          <p:cNvPr id="2" name="Picture 1">
-            <a:extLst>
-              <a:ext uri="{FF2B5EF4-FFF2-40B4-BE49-F238E27FC236}">
-                <a16:creationId xmlns:a16="http://schemas.microsoft.com/office/drawing/2014/main" id="{CFF17C68-0085-367E-677D-A9926FD98733}"/>
+          <p:cNvPr id="3" name="Picture 2">
+            <a:extLst>
+              <a:ext uri="{FF2B5EF4-FFF2-40B4-BE49-F238E27FC236}">
+                <a16:creationId xmlns:a16="http://schemas.microsoft.com/office/drawing/2014/main" id="{5EDF68E8-8DE5-1FE3-D68D-98D32BF00749}"/>
               </a:ext>
             </a:extLst>
           </p:cNvPr>
@@ -5734,20 +5734,96 @@
         </p:blipFill>
         <p:spPr>
           <a:xfrm>
-            <a:off x="976412" y="2796168"/>
-            <a:ext cx="2800920" cy="2100690"/>
+            <a:off x="3642062" y="705001"/>
+            <a:ext cx="2649204" cy="1986903"/>
           </a:xfrm>
           <a:prstGeom prst="rect">
             <a:avLst/>
           </a:prstGeom>
         </p:spPr>
       </p:pic>
+      <p:sp>
+        <p:nvSpPr>
+          <p:cNvPr id="4" name="TextBox 3">
+            <a:extLst>
+              <a:ext uri="{FF2B5EF4-FFF2-40B4-BE49-F238E27FC236}">
+                <a16:creationId xmlns:a16="http://schemas.microsoft.com/office/drawing/2014/main" id="{5583296B-7038-9C89-415F-E0212B76776D}"/>
+              </a:ext>
+            </a:extLst>
+          </p:cNvPr>
+          <p:cNvSpPr txBox="1"/>
+          <p:nvPr/>
+        </p:nvSpPr>
+        <p:spPr>
+          <a:xfrm>
+            <a:off x="3768311" y="225289"/>
+            <a:ext cx="2642616" cy="369332"/>
+          </a:xfrm>
+          <a:prstGeom prst="rect">
+            <a:avLst/>
+          </a:prstGeom>
+          <a:noFill/>
+        </p:spPr>
+        <p:txBody>
+          <a:bodyPr wrap="square" rtlCol="0">
+            <a:spAutoFit/>
+          </a:bodyPr>
+          <a:lstStyle/>
+          <a:p>
+            <a:r>
+              <a:rPr lang="en-US" dirty="0">
+                <a:latin typeface="Times New Roman" panose="02020603050405020304" pitchFamily="18" charset="0"/>
+                <a:cs typeface="Times New Roman" panose="02020603050405020304" pitchFamily="18" charset="0"/>
+              </a:rPr>
+              <a:t>Counts : 60k (@1mW) </a:t>
+            </a:r>
+          </a:p>
+        </p:txBody>
+      </p:sp>
+      <p:sp>
+        <p:nvSpPr>
+          <p:cNvPr id="9" name="TextBox 8">
+            <a:extLst>
+              <a:ext uri="{FF2B5EF4-FFF2-40B4-BE49-F238E27FC236}">
+                <a16:creationId xmlns:a16="http://schemas.microsoft.com/office/drawing/2014/main" id="{40A0449B-ABE3-C9C7-1E5C-1C49A5B76A99}"/>
+              </a:ext>
+            </a:extLst>
+          </p:cNvPr>
+          <p:cNvSpPr txBox="1"/>
+          <p:nvPr/>
+        </p:nvSpPr>
+        <p:spPr>
+          <a:xfrm>
+            <a:off x="6517975" y="210498"/>
+            <a:ext cx="2642616" cy="369332"/>
+          </a:xfrm>
+          <a:prstGeom prst="rect">
+            <a:avLst/>
+          </a:prstGeom>
+          <a:noFill/>
+        </p:spPr>
+        <p:txBody>
+          <a:bodyPr wrap="square" rtlCol="0">
+            <a:spAutoFit/>
+          </a:bodyPr>
+          <a:lstStyle/>
+          <a:p>
+            <a:r>
+              <a:rPr lang="en-US" dirty="0">
+                <a:latin typeface="Times New Roman" panose="02020603050405020304" pitchFamily="18" charset="0"/>
+                <a:cs typeface="Times New Roman" panose="02020603050405020304" pitchFamily="18" charset="0"/>
+              </a:rPr>
+              <a:t>Counts : 60k (@1mW) </a:t>
+            </a:r>
+          </a:p>
+        </p:txBody>
+      </p:sp>
       <p:pic>
         <p:nvPicPr>
-          <p:cNvPr id="3" name="Picture 2">
-            <a:extLst>
-              <a:ext uri="{FF2B5EF4-FFF2-40B4-BE49-F238E27FC236}">
-                <a16:creationId xmlns:a16="http://schemas.microsoft.com/office/drawing/2014/main" id="{5EDF68E8-8DE5-1FE3-D68D-98D32BF00749}"/>
+          <p:cNvPr id="10" name="Picture 9">
+            <a:extLst>
+              <a:ext uri="{FF2B5EF4-FFF2-40B4-BE49-F238E27FC236}">
+                <a16:creationId xmlns:a16="http://schemas.microsoft.com/office/drawing/2014/main" id="{C19F1D9F-099A-C5E2-25F8-2ECA83A2A937}"/>
               </a:ext>
             </a:extLst>
           </p:cNvPr>
@@ -5770,58 +5846,20 @@
         </p:blipFill>
         <p:spPr>
           <a:xfrm>
-            <a:off x="1093968" y="667286"/>
-            <a:ext cx="2800920" cy="2100690"/>
+            <a:off x="7288950" y="5234592"/>
+            <a:ext cx="1449992" cy="1087494"/>
           </a:xfrm>
           <a:prstGeom prst="rect">
             <a:avLst/>
           </a:prstGeom>
         </p:spPr>
       </p:pic>
-      <p:sp>
-        <p:nvSpPr>
-          <p:cNvPr id="4" name="TextBox 3">
-            <a:extLst>
-              <a:ext uri="{FF2B5EF4-FFF2-40B4-BE49-F238E27FC236}">
-                <a16:creationId xmlns:a16="http://schemas.microsoft.com/office/drawing/2014/main" id="{5583296B-7038-9C89-415F-E0212B76776D}"/>
-              </a:ext>
-            </a:extLst>
-          </p:cNvPr>
-          <p:cNvSpPr txBox="1"/>
-          <p:nvPr/>
-        </p:nvSpPr>
-        <p:spPr>
-          <a:xfrm>
-            <a:off x="1252272" y="283858"/>
-            <a:ext cx="2642616" cy="369332"/>
-          </a:xfrm>
-          <a:prstGeom prst="rect">
-            <a:avLst/>
-          </a:prstGeom>
-          <a:noFill/>
-        </p:spPr>
-        <p:txBody>
-          <a:bodyPr wrap="square" rtlCol="0">
-            <a:spAutoFit/>
-          </a:bodyPr>
-          <a:lstStyle/>
-          <a:p>
-            <a:r>
-              <a:rPr lang="en-US" dirty="0">
-                <a:latin typeface="Times New Roman" panose="02020603050405020304" pitchFamily="18" charset="0"/>
-                <a:cs typeface="Times New Roman" panose="02020603050405020304" pitchFamily="18" charset="0"/>
-              </a:rPr>
-              <a:t>Counts : 60k (@1mW) </a:t>
-            </a:r>
-          </a:p>
-        </p:txBody>
-      </p:sp>
       <p:pic>
         <p:nvPicPr>
-          <p:cNvPr id="5" name="Picture 4">
-            <a:extLst>
-              <a:ext uri="{FF2B5EF4-FFF2-40B4-BE49-F238E27FC236}">
-                <a16:creationId xmlns:a16="http://schemas.microsoft.com/office/drawing/2014/main" id="{77CF8D8C-4D9B-D2DD-B7C5-F5F4C499072E}"/>
+          <p:cNvPr id="11" name="Picture 10">
+            <a:extLst>
+              <a:ext uri="{FF2B5EF4-FFF2-40B4-BE49-F238E27FC236}">
+                <a16:creationId xmlns:a16="http://schemas.microsoft.com/office/drawing/2014/main" id="{613BD4EA-96BE-FB73-F02B-D4DDDB4D06DA}"/>
               </a:ext>
             </a:extLst>
           </p:cNvPr>
@@ -5844,8 +5882,8 @@
         </p:blipFill>
         <p:spPr>
           <a:xfrm>
-            <a:off x="2106510" y="5176612"/>
-            <a:ext cx="1749552" cy="1312164"/>
+            <a:off x="5792979" y="5207626"/>
+            <a:ext cx="1449992" cy="1087494"/>
           </a:xfrm>
           <a:prstGeom prst="rect">
             <a:avLst/>
@@ -5854,10 +5892,10 @@
       </p:pic>
       <p:pic>
         <p:nvPicPr>
-          <p:cNvPr id="6" name="Picture 5">
-            <a:extLst>
-              <a:ext uri="{FF2B5EF4-FFF2-40B4-BE49-F238E27FC236}">
-                <a16:creationId xmlns:a16="http://schemas.microsoft.com/office/drawing/2014/main" id="{85A07989-FB5C-E588-DF64-A9C65CA804AB}"/>
+          <p:cNvPr id="12" name="Picture 11">
+            <a:extLst>
+              <a:ext uri="{FF2B5EF4-FFF2-40B4-BE49-F238E27FC236}">
+                <a16:creationId xmlns:a16="http://schemas.microsoft.com/office/drawing/2014/main" id="{8D9D76CB-77F6-ACA9-29F4-74C0449B5B8C}"/>
               </a:ext>
             </a:extLst>
           </p:cNvPr>
@@ -5880,8 +5918,8 @@
         </p:blipFill>
         <p:spPr>
           <a:xfrm>
-            <a:off x="219192" y="5090612"/>
-            <a:ext cx="1749552" cy="1312164"/>
+            <a:off x="9081439" y="2767976"/>
+            <a:ext cx="2649205" cy="1986904"/>
           </a:xfrm>
           <a:prstGeom prst="rect">
             <a:avLst/>
@@ -5890,10 +5928,10 @@
       </p:pic>
       <p:pic>
         <p:nvPicPr>
-          <p:cNvPr id="7" name="Picture 6">
-            <a:extLst>
-              <a:ext uri="{FF2B5EF4-FFF2-40B4-BE49-F238E27FC236}">
-                <a16:creationId xmlns:a16="http://schemas.microsoft.com/office/drawing/2014/main" id="{CEACBEFC-276F-8D8B-915F-231E906E5628}"/>
+          <p:cNvPr id="13" name="Picture 12">
+            <a:extLst>
+              <a:ext uri="{FF2B5EF4-FFF2-40B4-BE49-F238E27FC236}">
+                <a16:creationId xmlns:a16="http://schemas.microsoft.com/office/drawing/2014/main" id="{B7ED87D5-6880-8FC3-5921-168FB582BBE1}"/>
               </a:ext>
             </a:extLst>
           </p:cNvPr>
@@ -5916,8 +5954,8 @@
         </p:blipFill>
         <p:spPr>
           <a:xfrm>
-            <a:off x="4860050" y="2796167"/>
-            <a:ext cx="2800921" cy="2100691"/>
+            <a:off x="9081439" y="635020"/>
+            <a:ext cx="2649205" cy="1986904"/>
           </a:xfrm>
           <a:prstGeom prst="rect">
             <a:avLst/>
@@ -5926,10 +5964,10 @@
       </p:pic>
       <p:pic>
         <p:nvPicPr>
-          <p:cNvPr id="8" name="Picture 7">
-            <a:extLst>
-              <a:ext uri="{FF2B5EF4-FFF2-40B4-BE49-F238E27FC236}">
-                <a16:creationId xmlns:a16="http://schemas.microsoft.com/office/drawing/2014/main" id="{A4CFC993-0FAC-1DF7-FF77-1B278EC32451}"/>
+          <p:cNvPr id="14" name="Picture 13">
+            <a:extLst>
+              <a:ext uri="{FF2B5EF4-FFF2-40B4-BE49-F238E27FC236}">
+                <a16:creationId xmlns:a16="http://schemas.microsoft.com/office/drawing/2014/main" id="{7B513BB5-DDB8-A679-4563-2414BBD53BCC}"/>
               </a:ext>
             </a:extLst>
           </p:cNvPr>
@@ -5952,58 +5990,20 @@
         </p:blipFill>
         <p:spPr>
           <a:xfrm>
-            <a:off x="4860051" y="587656"/>
-            <a:ext cx="2800921" cy="2100691"/>
+            <a:off x="8924320" y="5185796"/>
+            <a:ext cx="1557579" cy="1168184"/>
           </a:xfrm>
           <a:prstGeom prst="rect">
             <a:avLst/>
           </a:prstGeom>
         </p:spPr>
       </p:pic>
-      <p:sp>
-        <p:nvSpPr>
-          <p:cNvPr id="9" name="TextBox 8">
-            <a:extLst>
-              <a:ext uri="{FF2B5EF4-FFF2-40B4-BE49-F238E27FC236}">
-                <a16:creationId xmlns:a16="http://schemas.microsoft.com/office/drawing/2014/main" id="{40A0449B-ABE3-C9C7-1E5C-1C49A5B76A99}"/>
-              </a:ext>
-            </a:extLst>
-          </p:cNvPr>
-          <p:cNvSpPr txBox="1"/>
-          <p:nvPr/>
-        </p:nvSpPr>
-        <p:spPr>
-          <a:xfrm>
-            <a:off x="5018356" y="265688"/>
-            <a:ext cx="2642616" cy="369332"/>
-          </a:xfrm>
-          <a:prstGeom prst="rect">
-            <a:avLst/>
-          </a:prstGeom>
-          <a:noFill/>
-        </p:spPr>
-        <p:txBody>
-          <a:bodyPr wrap="square" rtlCol="0">
-            <a:spAutoFit/>
-          </a:bodyPr>
-          <a:lstStyle/>
-          <a:p>
-            <a:r>
-              <a:rPr lang="en-US" dirty="0">
-                <a:latin typeface="Times New Roman" panose="02020603050405020304" pitchFamily="18" charset="0"/>
-                <a:cs typeface="Times New Roman" panose="02020603050405020304" pitchFamily="18" charset="0"/>
-              </a:rPr>
-              <a:t>Counts : 60k (@1mW) </a:t>
-            </a:r>
-          </a:p>
-        </p:txBody>
-      </p:sp>
       <p:pic>
         <p:nvPicPr>
-          <p:cNvPr id="10" name="Picture 9">
-            <a:extLst>
-              <a:ext uri="{FF2B5EF4-FFF2-40B4-BE49-F238E27FC236}">
-                <a16:creationId xmlns:a16="http://schemas.microsoft.com/office/drawing/2014/main" id="{C19F1D9F-099A-C5E2-25F8-2ECA83A2A937}"/>
+          <p:cNvPr id="15" name="Picture 14">
+            <a:extLst>
+              <a:ext uri="{FF2B5EF4-FFF2-40B4-BE49-F238E27FC236}">
+                <a16:creationId xmlns:a16="http://schemas.microsoft.com/office/drawing/2014/main" id="{74EDCCDC-6E49-28CE-21D7-8F1754D26E2C}"/>
               </a:ext>
             </a:extLst>
           </p:cNvPr>
@@ -6026,20 +6026,58 @@
         </p:blipFill>
         <p:spPr>
           <a:xfrm>
-            <a:off x="6173710" y="5249376"/>
-            <a:ext cx="1740408" cy="1305306"/>
+            <a:off x="10634421" y="5168686"/>
+            <a:ext cx="1557579" cy="1168184"/>
           </a:xfrm>
           <a:prstGeom prst="rect">
             <a:avLst/>
           </a:prstGeom>
         </p:spPr>
       </p:pic>
+      <p:sp>
+        <p:nvSpPr>
+          <p:cNvPr id="16" name="TextBox 15">
+            <a:extLst>
+              <a:ext uri="{FF2B5EF4-FFF2-40B4-BE49-F238E27FC236}">
+                <a16:creationId xmlns:a16="http://schemas.microsoft.com/office/drawing/2014/main" id="{8B011D4A-0D15-3A36-67B1-EF50E543930F}"/>
+              </a:ext>
+            </a:extLst>
+          </p:cNvPr>
+          <p:cNvSpPr txBox="1"/>
+          <p:nvPr/>
+        </p:nvSpPr>
+        <p:spPr>
+          <a:xfrm>
+            <a:off x="9160591" y="233423"/>
+            <a:ext cx="2642616" cy="369332"/>
+          </a:xfrm>
+          <a:prstGeom prst="rect">
+            <a:avLst/>
+          </a:prstGeom>
+          <a:noFill/>
+        </p:spPr>
+        <p:txBody>
+          <a:bodyPr wrap="square" rtlCol="0">
+            <a:spAutoFit/>
+          </a:bodyPr>
+          <a:lstStyle/>
+          <a:p>
+            <a:r>
+              <a:rPr lang="en-US" dirty="0">
+                <a:latin typeface="Times New Roman" panose="02020603050405020304" pitchFamily="18" charset="0"/>
+                <a:cs typeface="Times New Roman" panose="02020603050405020304" pitchFamily="18" charset="0"/>
+              </a:rPr>
+              <a:t>Counts : 33k (@1mW) </a:t>
+            </a:r>
+          </a:p>
+        </p:txBody>
+      </p:sp>
       <p:pic>
         <p:nvPicPr>
-          <p:cNvPr id="11" name="Picture 10">
-            <a:extLst>
-              <a:ext uri="{FF2B5EF4-FFF2-40B4-BE49-F238E27FC236}">
-                <a16:creationId xmlns:a16="http://schemas.microsoft.com/office/drawing/2014/main" id="{613BD4EA-96BE-FB73-F02B-D4DDDB4D06DA}"/>
+          <p:cNvPr id="17" name="Picture 16">
+            <a:extLst>
+              <a:ext uri="{FF2B5EF4-FFF2-40B4-BE49-F238E27FC236}">
+                <a16:creationId xmlns:a16="http://schemas.microsoft.com/office/drawing/2014/main" id="{3F01A350-EE44-DBC1-A334-85211F45248F}"/>
               </a:ext>
             </a:extLst>
           </p:cNvPr>
@@ -6062,8 +6100,8 @@
         </p:blipFill>
         <p:spPr>
           <a:xfrm>
-            <a:off x="4407736" y="5234592"/>
-            <a:ext cx="1740408" cy="1305306"/>
+            <a:off x="3524506" y="2767977"/>
+            <a:ext cx="2649204" cy="1986903"/>
           </a:xfrm>
           <a:prstGeom prst="rect">
             <a:avLst/>
@@ -6072,10 +6110,10 @@
       </p:pic>
       <p:pic>
         <p:nvPicPr>
-          <p:cNvPr id="12" name="Picture 11">
-            <a:extLst>
-              <a:ext uri="{FF2B5EF4-FFF2-40B4-BE49-F238E27FC236}">
-                <a16:creationId xmlns:a16="http://schemas.microsoft.com/office/drawing/2014/main" id="{8D9D76CB-77F6-ACA9-29F4-74C0449B5B8C}"/>
+          <p:cNvPr id="18" name="Picture 17">
+            <a:extLst>
+              <a:ext uri="{FF2B5EF4-FFF2-40B4-BE49-F238E27FC236}">
+                <a16:creationId xmlns:a16="http://schemas.microsoft.com/office/drawing/2014/main" id="{A9A83EF4-B7D1-40F9-FCA6-7F5A8465AD58}"/>
               </a:ext>
             </a:extLst>
           </p:cNvPr>
@@ -6098,8 +6136,8 @@
         </p:blipFill>
         <p:spPr>
           <a:xfrm>
-            <a:off x="9081439" y="2767976"/>
-            <a:ext cx="2800921" cy="2100691"/>
+            <a:off x="4353270" y="5215338"/>
+            <a:ext cx="1439709" cy="1079782"/>
           </a:xfrm>
           <a:prstGeom prst="rect">
             <a:avLst/>
@@ -6108,10 +6146,10 @@
       </p:pic>
       <p:pic>
         <p:nvPicPr>
-          <p:cNvPr id="13" name="Picture 12">
-            <a:extLst>
-              <a:ext uri="{FF2B5EF4-FFF2-40B4-BE49-F238E27FC236}">
-                <a16:creationId xmlns:a16="http://schemas.microsoft.com/office/drawing/2014/main" id="{B7ED87D5-6880-8FC3-5921-168FB582BBE1}"/>
+          <p:cNvPr id="19" name="Picture 18">
+            <a:extLst>
+              <a:ext uri="{FF2B5EF4-FFF2-40B4-BE49-F238E27FC236}">
+                <a16:creationId xmlns:a16="http://schemas.microsoft.com/office/drawing/2014/main" id="{237958AA-E73F-7D9B-3B6A-4792C57D3204}"/>
               </a:ext>
             </a:extLst>
           </p:cNvPr>
@@ -6134,8 +6172,8 @@
         </p:blipFill>
         <p:spPr>
           <a:xfrm>
-            <a:off x="9081439" y="635020"/>
-            <a:ext cx="2800921" cy="2100691"/>
+            <a:off x="2885430" y="5238448"/>
+            <a:ext cx="1439709" cy="1079782"/>
           </a:xfrm>
           <a:prstGeom prst="rect">
             <a:avLst/>
@@ -6144,10 +6182,10 @@
       </p:pic>
       <p:pic>
         <p:nvPicPr>
-          <p:cNvPr id="14" name="Picture 13">
-            <a:extLst>
-              <a:ext uri="{FF2B5EF4-FFF2-40B4-BE49-F238E27FC236}">
-                <a16:creationId xmlns:a16="http://schemas.microsoft.com/office/drawing/2014/main" id="{7B513BB5-DDB8-A679-4563-2414BBD53BCC}"/>
+          <p:cNvPr id="20" name="Picture 19">
+            <a:extLst>
+              <a:ext uri="{FF2B5EF4-FFF2-40B4-BE49-F238E27FC236}">
+                <a16:creationId xmlns:a16="http://schemas.microsoft.com/office/drawing/2014/main" id="{6777C3DE-0364-9199-415E-7FCDFBF80F44}"/>
               </a:ext>
             </a:extLst>
           </p:cNvPr>
@@ -6170,8 +6208,8 @@
         </p:blipFill>
         <p:spPr>
           <a:xfrm>
-            <a:off x="8636922" y="5234592"/>
-            <a:ext cx="1740408" cy="1305306"/>
+            <a:off x="6359669" y="2767976"/>
+            <a:ext cx="2649205" cy="1986904"/>
           </a:xfrm>
           <a:prstGeom prst="rect">
             <a:avLst/>
@@ -6180,10 +6218,10 @@
       </p:pic>
       <p:pic>
         <p:nvPicPr>
-          <p:cNvPr id="15" name="Picture 14">
-            <a:extLst>
-              <a:ext uri="{FF2B5EF4-FFF2-40B4-BE49-F238E27FC236}">
-                <a16:creationId xmlns:a16="http://schemas.microsoft.com/office/drawing/2014/main" id="{74EDCCDC-6E49-28CE-21D7-8F1754D26E2C}"/>
+          <p:cNvPr id="21" name="Picture 20">
+            <a:extLst>
+              <a:ext uri="{FF2B5EF4-FFF2-40B4-BE49-F238E27FC236}">
+                <a16:creationId xmlns:a16="http://schemas.microsoft.com/office/drawing/2014/main" id="{70262D55-1938-06F6-3D0B-BF9ECF03CCC2}"/>
               </a:ext>
             </a:extLst>
           </p:cNvPr>
@@ -6206,20 +6244,164 @@
         </p:blipFill>
         <p:spPr>
           <a:xfrm>
-            <a:off x="10402896" y="5183470"/>
-            <a:ext cx="1740408" cy="1305306"/>
+            <a:off x="6530588" y="625680"/>
+            <a:ext cx="2649205" cy="1986904"/>
           </a:xfrm>
           <a:prstGeom prst="rect">
             <a:avLst/>
           </a:prstGeom>
         </p:spPr>
       </p:pic>
-      <p:sp>
-        <p:nvSpPr>
-          <p:cNvPr id="16" name="TextBox 15">
-            <a:extLst>
-              <a:ext uri="{FF2B5EF4-FFF2-40B4-BE49-F238E27FC236}">
-                <a16:creationId xmlns:a16="http://schemas.microsoft.com/office/drawing/2014/main" id="{8B011D4A-0D15-3A36-67B1-EF50E543930F}"/>
+      <p:pic>
+        <p:nvPicPr>
+          <p:cNvPr id="24" name="Picture 23">
+            <a:extLst>
+              <a:ext uri="{FF2B5EF4-FFF2-40B4-BE49-F238E27FC236}">
+                <a16:creationId xmlns:a16="http://schemas.microsoft.com/office/drawing/2014/main" id="{965889BF-B9C1-B202-1D03-FB031E171A59}"/>
+              </a:ext>
+            </a:extLst>
+          </p:cNvPr>
+          <p:cNvPicPr>
+            <a:picLocks noChangeAspect="1"/>
+          </p:cNvPicPr>
+          <p:nvPr/>
+        </p:nvPicPr>
+        <p:blipFill>
+          <a:blip r:embed="rId14">
+            <a:extLst>
+              <a:ext uri="{28A0092B-C50C-407E-A947-70E740481C1C}">
+                <a14:useLocalDpi xmlns:a14="http://schemas.microsoft.com/office/drawing/2010/main" val="0"/>
+              </a:ext>
+            </a:extLst>
+          </a:blip>
+          <a:stretch>
+            <a:fillRect/>
+          </a:stretch>
+        </p:blipFill>
+        <p:spPr>
+          <a:xfrm>
+            <a:off x="617845" y="2900429"/>
+            <a:ext cx="2649204" cy="1986903"/>
+          </a:xfrm>
+          <a:prstGeom prst="rect">
+            <a:avLst/>
+          </a:prstGeom>
+        </p:spPr>
+      </p:pic>
+      <p:pic>
+        <p:nvPicPr>
+          <p:cNvPr id="25" name="Picture 24">
+            <a:extLst>
+              <a:ext uri="{FF2B5EF4-FFF2-40B4-BE49-F238E27FC236}">
+                <a16:creationId xmlns:a16="http://schemas.microsoft.com/office/drawing/2014/main" id="{0CF051EC-5AD9-5CC7-0B02-92FF85BFAA35}"/>
+              </a:ext>
+            </a:extLst>
+          </p:cNvPr>
+          <p:cNvPicPr>
+            <a:picLocks noChangeAspect="1"/>
+          </p:cNvPicPr>
+          <p:nvPr/>
+        </p:nvPicPr>
+        <p:blipFill>
+          <a:blip r:embed="rId15">
+            <a:extLst>
+              <a:ext uri="{28A0092B-C50C-407E-A947-70E740481C1C}">
+                <a14:useLocalDpi xmlns:a14="http://schemas.microsoft.com/office/drawing/2010/main" val="0"/>
+              </a:ext>
+            </a:extLst>
+          </a:blip>
+          <a:stretch>
+            <a:fillRect/>
+          </a:stretch>
+        </p:blipFill>
+        <p:spPr>
+          <a:xfrm>
+            <a:off x="875966" y="781073"/>
+            <a:ext cx="2649204" cy="1986903"/>
+          </a:xfrm>
+          <a:prstGeom prst="rect">
+            <a:avLst/>
+          </a:prstGeom>
+        </p:spPr>
+      </p:pic>
+      <p:pic>
+        <p:nvPicPr>
+          <p:cNvPr id="26" name="Picture 25">
+            <a:extLst>
+              <a:ext uri="{FF2B5EF4-FFF2-40B4-BE49-F238E27FC236}">
+                <a16:creationId xmlns:a16="http://schemas.microsoft.com/office/drawing/2014/main" id="{52754362-05EF-B937-26BC-375F82CB6BF2}"/>
+              </a:ext>
+            </a:extLst>
+          </p:cNvPr>
+          <p:cNvPicPr>
+            <a:picLocks noChangeAspect="1"/>
+          </p:cNvPicPr>
+          <p:nvPr/>
+        </p:nvPicPr>
+        <p:blipFill>
+          <a:blip r:embed="rId16">
+            <a:extLst>
+              <a:ext uri="{28A0092B-C50C-407E-A947-70E740481C1C}">
+                <a14:useLocalDpi xmlns:a14="http://schemas.microsoft.com/office/drawing/2010/main" val="0"/>
+              </a:ext>
+            </a:extLst>
+          </a:blip>
+          <a:stretch>
+            <a:fillRect/>
+          </a:stretch>
+        </p:blipFill>
+        <p:spPr>
+          <a:xfrm>
+            <a:off x="199856" y="5251543"/>
+            <a:ext cx="1404790" cy="1053592"/>
+          </a:xfrm>
+          <a:prstGeom prst="rect">
+            <a:avLst/>
+          </a:prstGeom>
+        </p:spPr>
+      </p:pic>
+      <p:pic>
+        <p:nvPicPr>
+          <p:cNvPr id="27" name="Picture 26">
+            <a:extLst>
+              <a:ext uri="{FF2B5EF4-FFF2-40B4-BE49-F238E27FC236}">
+                <a16:creationId xmlns:a16="http://schemas.microsoft.com/office/drawing/2014/main" id="{29AA9536-D3E0-45CA-2A00-B6F5BF63C654}"/>
+              </a:ext>
+            </a:extLst>
+          </p:cNvPr>
+          <p:cNvPicPr>
+            <a:picLocks noChangeAspect="1"/>
+          </p:cNvPicPr>
+          <p:nvPr/>
+        </p:nvPicPr>
+        <p:blipFill>
+          <a:blip r:embed="rId17">
+            <a:extLst>
+              <a:ext uri="{28A0092B-C50C-407E-A947-70E740481C1C}">
+                <a14:useLocalDpi xmlns:a14="http://schemas.microsoft.com/office/drawing/2010/main" val="0"/>
+              </a:ext>
+            </a:extLst>
+          </a:blip>
+          <a:stretch>
+            <a:fillRect/>
+          </a:stretch>
+        </p:blipFill>
+        <p:spPr>
+          <a:xfrm>
+            <a:off x="1480640" y="5264638"/>
+            <a:ext cx="1404790" cy="1053592"/>
+          </a:xfrm>
+          <a:prstGeom prst="rect">
+            <a:avLst/>
+          </a:prstGeom>
+        </p:spPr>
+      </p:pic>
+      <p:sp>
+        <p:nvSpPr>
+          <p:cNvPr id="28" name="TextBox 27">
+            <a:extLst>
+              <a:ext uri="{FF2B5EF4-FFF2-40B4-BE49-F238E27FC236}">
+                <a16:creationId xmlns:a16="http://schemas.microsoft.com/office/drawing/2014/main" id="{FEFA54CF-3D01-218F-7EDC-1DF8E359EFA1}"/>
               </a:ext>
             </a:extLst>
           </p:cNvPr>
@@ -6228,7 +6410,7 @@
         </p:nvSpPr>
         <p:spPr>
           <a:xfrm>
-            <a:off x="9160591" y="233423"/>
+            <a:off x="999446" y="221433"/>
             <a:ext cx="2642616" cy="369332"/>
           </a:xfrm>
           <a:prstGeom prst="rect">
@@ -6247,7 +6429,45 @@
                 <a:latin typeface="Times New Roman" panose="02020603050405020304" pitchFamily="18" charset="0"/>
                 <a:cs typeface="Times New Roman" panose="02020603050405020304" pitchFamily="18" charset="0"/>
               </a:rPr>
-              <a:t>Counts : 33k (@1mW) </a:t>
+              <a:t>Counts : 120k (@1mW) </a:t>
+            </a:r>
+          </a:p>
+        </p:txBody>
+      </p:sp>
+      <p:sp>
+        <p:nvSpPr>
+          <p:cNvPr id="29" name="TextBox 28">
+            <a:extLst>
+              <a:ext uri="{FF2B5EF4-FFF2-40B4-BE49-F238E27FC236}">
+                <a16:creationId xmlns:a16="http://schemas.microsoft.com/office/drawing/2014/main" id="{69BEED2C-58B2-1901-0709-84C325EEB674}"/>
+              </a:ext>
+            </a:extLst>
+          </p:cNvPr>
+          <p:cNvSpPr txBox="1"/>
+          <p:nvPr/>
+        </p:nvSpPr>
+        <p:spPr>
+          <a:xfrm>
+            <a:off x="1562845" y="585380"/>
+            <a:ext cx="2642616" cy="246221"/>
+          </a:xfrm>
+          <a:prstGeom prst="rect">
+            <a:avLst/>
+          </a:prstGeom>
+          <a:noFill/>
+        </p:spPr>
+        <p:txBody>
+          <a:bodyPr wrap="square" rtlCol="0">
+            <a:spAutoFit/>
+          </a:bodyPr>
+          <a:lstStyle/>
+          <a:p>
+            <a:r>
+              <a:rPr lang="en-US" sz="1000" dirty="0">
+                <a:latin typeface="Times New Roman" panose="02020603050405020304" pitchFamily="18" charset="0"/>
+                <a:cs typeface="Times New Roman" panose="02020603050405020304" pitchFamily="18" charset="0"/>
+              </a:rPr>
+              <a:t>Bare nanodiamonds</a:t>
             </a:r>
           </a:p>
         </p:txBody>

--- a/codes/data/2025/Oct_10/statistics.pptx
+++ b/codes/data/2025/Oct_10/statistics.pptx
@@ -275,7 +275,7 @@
           <a:p>
             <a:fld id="{AF3803EA-E887-4286-BA36-FF25281E5B58}" type="datetimeFigureOut">
               <a:rPr lang="en-US" smtClean="0"/>
-              <a:t>10/11/2025</a:t>
+              <a:t>10/18/2025</a:t>
             </a:fld>
             <a:endParaRPr lang="en-US"/>
           </a:p>
@@ -473,7 +473,7 @@
           <a:p>
             <a:fld id="{AF3803EA-E887-4286-BA36-FF25281E5B58}" type="datetimeFigureOut">
               <a:rPr lang="en-US" smtClean="0"/>
-              <a:t>10/11/2025</a:t>
+              <a:t>10/18/2025</a:t>
             </a:fld>
             <a:endParaRPr lang="en-US"/>
           </a:p>
@@ -681,7 +681,7 @@
           <a:p>
             <a:fld id="{AF3803EA-E887-4286-BA36-FF25281E5B58}" type="datetimeFigureOut">
               <a:rPr lang="en-US" smtClean="0"/>
-              <a:t>10/11/2025</a:t>
+              <a:t>10/18/2025</a:t>
             </a:fld>
             <a:endParaRPr lang="en-US"/>
           </a:p>
@@ -879,7 +879,7 @@
           <a:p>
             <a:fld id="{AF3803EA-E887-4286-BA36-FF25281E5B58}" type="datetimeFigureOut">
               <a:rPr lang="en-US" smtClean="0"/>
-              <a:t>10/11/2025</a:t>
+              <a:t>10/18/2025</a:t>
             </a:fld>
             <a:endParaRPr lang="en-US"/>
           </a:p>
@@ -1154,7 +1154,7 @@
           <a:p>
             <a:fld id="{AF3803EA-E887-4286-BA36-FF25281E5B58}" type="datetimeFigureOut">
               <a:rPr lang="en-US" smtClean="0"/>
-              <a:t>10/11/2025</a:t>
+              <a:t>10/18/2025</a:t>
             </a:fld>
             <a:endParaRPr lang="en-US"/>
           </a:p>
@@ -1419,7 +1419,7 @@
           <a:p>
             <a:fld id="{AF3803EA-E887-4286-BA36-FF25281E5B58}" type="datetimeFigureOut">
               <a:rPr lang="en-US" smtClean="0"/>
-              <a:t>10/11/2025</a:t>
+              <a:t>10/18/2025</a:t>
             </a:fld>
             <a:endParaRPr lang="en-US"/>
           </a:p>
@@ -1831,7 +1831,7 @@
           <a:p>
             <a:fld id="{AF3803EA-E887-4286-BA36-FF25281E5B58}" type="datetimeFigureOut">
               <a:rPr lang="en-US" smtClean="0"/>
-              <a:t>10/11/2025</a:t>
+              <a:t>10/18/2025</a:t>
             </a:fld>
             <a:endParaRPr lang="en-US"/>
           </a:p>
@@ -1972,7 +1972,7 @@
           <a:p>
             <a:fld id="{AF3803EA-E887-4286-BA36-FF25281E5B58}" type="datetimeFigureOut">
               <a:rPr lang="en-US" smtClean="0"/>
-              <a:t>10/11/2025</a:t>
+              <a:t>10/18/2025</a:t>
             </a:fld>
             <a:endParaRPr lang="en-US"/>
           </a:p>
@@ -2085,7 +2085,7 @@
           <a:p>
             <a:fld id="{AF3803EA-E887-4286-BA36-FF25281E5B58}" type="datetimeFigureOut">
               <a:rPr lang="en-US" smtClean="0"/>
-              <a:t>10/11/2025</a:t>
+              <a:t>10/18/2025</a:t>
             </a:fld>
             <a:endParaRPr lang="en-US"/>
           </a:p>
@@ -2396,7 +2396,7 @@
           <a:p>
             <a:fld id="{AF3803EA-E887-4286-BA36-FF25281E5B58}" type="datetimeFigureOut">
               <a:rPr lang="en-US" smtClean="0"/>
-              <a:t>10/11/2025</a:t>
+              <a:t>10/18/2025</a:t>
             </a:fld>
             <a:endParaRPr lang="en-US"/>
           </a:p>
@@ -2684,7 +2684,7 @@
           <a:p>
             <a:fld id="{AF3803EA-E887-4286-BA36-FF25281E5B58}" type="datetimeFigureOut">
               <a:rPr lang="en-US" smtClean="0"/>
-              <a:t>10/11/2025</a:t>
+              <a:t>10/18/2025</a:t>
             </a:fld>
             <a:endParaRPr lang="en-US"/>
           </a:p>
@@ -2925,7 +2925,7 @@
           <a:p>
             <a:fld id="{AF3803EA-E887-4286-BA36-FF25281E5B58}" type="datetimeFigureOut">
               <a:rPr lang="en-US" smtClean="0"/>
-              <a:t>10/11/2025</a:t>
+              <a:t>10/18/2025</a:t>
             </a:fld>
             <a:endParaRPr lang="en-US"/>
           </a:p>
@@ -5734,7 +5734,7 @@
         </p:blipFill>
         <p:spPr>
           <a:xfrm>
-            <a:off x="3642062" y="705001"/>
+            <a:off x="853142" y="897025"/>
             <a:ext cx="2649204" cy="1986903"/>
           </a:xfrm>
           <a:prstGeom prst="rect">
@@ -5756,7 +5756,7 @@
         </p:nvSpPr>
         <p:spPr>
           <a:xfrm>
-            <a:off x="3768311" y="225289"/>
+            <a:off x="979391" y="417313"/>
             <a:ext cx="2642616" cy="369332"/>
           </a:xfrm>
           <a:prstGeom prst="rect">
@@ -5794,7 +5794,7 @@
         </p:nvSpPr>
         <p:spPr>
           <a:xfrm>
-            <a:off x="6517975" y="210498"/>
+            <a:off x="3729055" y="402522"/>
             <a:ext cx="2642616" cy="369332"/>
           </a:xfrm>
           <a:prstGeom prst="rect">
@@ -5846,7 +5846,7 @@
         </p:blipFill>
         <p:spPr>
           <a:xfrm>
-            <a:off x="7288950" y="5234592"/>
+            <a:off x="4500030" y="5426616"/>
             <a:ext cx="1449992" cy="1087494"/>
           </a:xfrm>
           <a:prstGeom prst="rect">
@@ -5882,7 +5882,7 @@
         </p:blipFill>
         <p:spPr>
           <a:xfrm>
-            <a:off x="5792979" y="5207626"/>
+            <a:off x="3004059" y="5399650"/>
             <a:ext cx="1449992" cy="1087494"/>
           </a:xfrm>
           <a:prstGeom prst="rect">
@@ -5918,7 +5918,7 @@
         </p:blipFill>
         <p:spPr>
           <a:xfrm>
-            <a:off x="9081439" y="2767976"/>
+            <a:off x="6292519" y="2960000"/>
             <a:ext cx="2649205" cy="1986904"/>
           </a:xfrm>
           <a:prstGeom prst="rect">
@@ -5954,7 +5954,7 @@
         </p:blipFill>
         <p:spPr>
           <a:xfrm>
-            <a:off x="9081439" y="635020"/>
+            <a:off x="6292519" y="827044"/>
             <a:ext cx="2649205" cy="1986904"/>
           </a:xfrm>
           <a:prstGeom prst="rect">
@@ -5990,7 +5990,7 @@
         </p:blipFill>
         <p:spPr>
           <a:xfrm>
-            <a:off x="8924320" y="5185796"/>
+            <a:off x="6135400" y="5377820"/>
             <a:ext cx="1557579" cy="1168184"/>
           </a:xfrm>
           <a:prstGeom prst="rect">
@@ -6026,7 +6026,7 @@
         </p:blipFill>
         <p:spPr>
           <a:xfrm>
-            <a:off x="10634421" y="5168686"/>
+            <a:off x="7845501" y="5360710"/>
             <a:ext cx="1557579" cy="1168184"/>
           </a:xfrm>
           <a:prstGeom prst="rect">
@@ -6048,7 +6048,7 @@
         </p:nvSpPr>
         <p:spPr>
           <a:xfrm>
-            <a:off x="9160591" y="233423"/>
+            <a:off x="6371671" y="425447"/>
             <a:ext cx="2642616" cy="369332"/>
           </a:xfrm>
           <a:prstGeom prst="rect">
@@ -6100,7 +6100,7 @@
         </p:blipFill>
         <p:spPr>
           <a:xfrm>
-            <a:off x="3524506" y="2767977"/>
+            <a:off x="735586" y="2960001"/>
             <a:ext cx="2649204" cy="1986903"/>
           </a:xfrm>
           <a:prstGeom prst="rect">
@@ -6136,7 +6136,7 @@
         </p:blipFill>
         <p:spPr>
           <a:xfrm>
-            <a:off x="4353270" y="5215338"/>
+            <a:off x="1564350" y="5407362"/>
             <a:ext cx="1439709" cy="1079782"/>
           </a:xfrm>
           <a:prstGeom prst="rect">
@@ -6172,7 +6172,7 @@
         </p:blipFill>
         <p:spPr>
           <a:xfrm>
-            <a:off x="2885430" y="5238448"/>
+            <a:off x="96510" y="5430472"/>
             <a:ext cx="1439709" cy="1079782"/>
           </a:xfrm>
           <a:prstGeom prst="rect">
@@ -6208,7 +6208,7 @@
         </p:blipFill>
         <p:spPr>
           <a:xfrm>
-            <a:off x="6359669" y="2767976"/>
+            <a:off x="3570749" y="2960000"/>
             <a:ext cx="2649205" cy="1986904"/>
           </a:xfrm>
           <a:prstGeom prst="rect">
@@ -6244,7 +6244,7 @@
         </p:blipFill>
         <p:spPr>
           <a:xfrm>
-            <a:off x="6530588" y="625680"/>
+            <a:off x="3741668" y="817704"/>
             <a:ext cx="2649205" cy="1986904"/>
           </a:xfrm>
           <a:prstGeom prst="rect">
@@ -6252,12 +6252,88 @@
           </a:prstGeom>
         </p:spPr>
       </p:pic>
+      <p:sp>
+        <p:nvSpPr>
+          <p:cNvPr id="8" name="TextBox 7">
+            <a:extLst>
+              <a:ext uri="{FF2B5EF4-FFF2-40B4-BE49-F238E27FC236}">
+                <a16:creationId xmlns:a16="http://schemas.microsoft.com/office/drawing/2014/main" id="{FEFA54CF-3D01-218F-7EDC-1DF8E359EFA1}"/>
+              </a:ext>
+            </a:extLst>
+          </p:cNvPr>
+          <p:cNvSpPr txBox="1"/>
+          <p:nvPr/>
+        </p:nvSpPr>
+        <p:spPr>
+          <a:xfrm>
+            <a:off x="9459626" y="436567"/>
+            <a:ext cx="2642616" cy="369332"/>
+          </a:xfrm>
+          <a:prstGeom prst="rect">
+            <a:avLst/>
+          </a:prstGeom>
+          <a:noFill/>
+        </p:spPr>
+        <p:txBody>
+          <a:bodyPr wrap="square" rtlCol="0">
+            <a:spAutoFit/>
+          </a:bodyPr>
+          <a:lstStyle/>
+          <a:p>
+            <a:r>
+              <a:rPr lang="en-US" dirty="0">
+                <a:latin typeface="Times New Roman" panose="02020603050405020304" pitchFamily="18" charset="0"/>
+                <a:cs typeface="Times New Roman" panose="02020603050405020304" pitchFamily="18" charset="0"/>
+              </a:rPr>
+              <a:t>Counts : 120k (@1mW) </a:t>
+            </a:r>
+          </a:p>
+        </p:txBody>
+      </p:sp>
+      <p:sp>
+        <p:nvSpPr>
+          <p:cNvPr id="22" name="TextBox 21">
+            <a:extLst>
+              <a:ext uri="{FF2B5EF4-FFF2-40B4-BE49-F238E27FC236}">
+                <a16:creationId xmlns:a16="http://schemas.microsoft.com/office/drawing/2014/main" id="{69BEED2C-58B2-1901-0709-84C325EEB674}"/>
+              </a:ext>
+            </a:extLst>
+          </p:cNvPr>
+          <p:cNvSpPr txBox="1"/>
+          <p:nvPr/>
+        </p:nvSpPr>
+        <p:spPr>
+          <a:xfrm>
+            <a:off x="10023025" y="800514"/>
+            <a:ext cx="2642616" cy="246221"/>
+          </a:xfrm>
+          <a:prstGeom prst="rect">
+            <a:avLst/>
+          </a:prstGeom>
+          <a:noFill/>
+        </p:spPr>
+        <p:txBody>
+          <a:bodyPr wrap="square" rtlCol="0">
+            <a:spAutoFit/>
+          </a:bodyPr>
+          <a:lstStyle/>
+          <a:p>
+            <a:r>
+              <a:rPr lang="en-US" sz="1000" dirty="0">
+                <a:latin typeface="Times New Roman" panose="02020603050405020304" pitchFamily="18" charset="0"/>
+                <a:cs typeface="Times New Roman" panose="02020603050405020304" pitchFamily="18" charset="0"/>
+              </a:rPr>
+              <a:t>Bare nanodiamonds</a:t>
+            </a:r>
+          </a:p>
+        </p:txBody>
+      </p:sp>
       <p:pic>
         <p:nvPicPr>
-          <p:cNvPr id="24" name="Picture 23">
-            <a:extLst>
-              <a:ext uri="{FF2B5EF4-FFF2-40B4-BE49-F238E27FC236}">
-                <a16:creationId xmlns:a16="http://schemas.microsoft.com/office/drawing/2014/main" id="{965889BF-B9C1-B202-1D03-FB031E171A59}"/>
+          <p:cNvPr id="23" name="Picture 22">
+            <a:extLst>
+              <a:ext uri="{FF2B5EF4-FFF2-40B4-BE49-F238E27FC236}">
+                <a16:creationId xmlns:a16="http://schemas.microsoft.com/office/drawing/2014/main" id="{33D7478F-0039-DEA0-10FF-50E40461C180}"/>
               </a:ext>
             </a:extLst>
           </p:cNvPr>
@@ -6280,7 +6356,7 @@
         </p:blipFill>
         <p:spPr>
           <a:xfrm>
-            <a:off x="617845" y="2900429"/>
+            <a:off x="9262253" y="2986190"/>
             <a:ext cx="2649204" cy="1986903"/>
           </a:xfrm>
           <a:prstGeom prst="rect">
@@ -6290,10 +6366,10 @@
       </p:pic>
       <p:pic>
         <p:nvPicPr>
-          <p:cNvPr id="25" name="Picture 24">
-            <a:extLst>
-              <a:ext uri="{FF2B5EF4-FFF2-40B4-BE49-F238E27FC236}">
-                <a16:creationId xmlns:a16="http://schemas.microsoft.com/office/drawing/2014/main" id="{0CF051EC-5AD9-5CC7-0B02-92FF85BFAA35}"/>
+          <p:cNvPr id="30" name="Picture 29">
+            <a:extLst>
+              <a:ext uri="{FF2B5EF4-FFF2-40B4-BE49-F238E27FC236}">
+                <a16:creationId xmlns:a16="http://schemas.microsoft.com/office/drawing/2014/main" id="{12D23EF0-6776-0F54-B9C1-1A13D7CCFC61}"/>
               </a:ext>
             </a:extLst>
           </p:cNvPr>
@@ -6316,7 +6392,7 @@
         </p:blipFill>
         <p:spPr>
           <a:xfrm>
-            <a:off x="875966" y="781073"/>
+            <a:off x="9335482" y="973097"/>
             <a:ext cx="2649204" cy="1986903"/>
           </a:xfrm>
           <a:prstGeom prst="rect">
@@ -6326,10 +6402,10 @@
       </p:pic>
       <p:pic>
         <p:nvPicPr>
-          <p:cNvPr id="26" name="Picture 25">
-            <a:extLst>
-              <a:ext uri="{FF2B5EF4-FFF2-40B4-BE49-F238E27FC236}">
-                <a16:creationId xmlns:a16="http://schemas.microsoft.com/office/drawing/2014/main" id="{52754362-05EF-B937-26BC-375F82CB6BF2}"/>
+          <p:cNvPr id="31" name="Picture 30">
+            <a:extLst>
+              <a:ext uri="{FF2B5EF4-FFF2-40B4-BE49-F238E27FC236}">
+                <a16:creationId xmlns:a16="http://schemas.microsoft.com/office/drawing/2014/main" id="{501748AC-3D4C-F3BC-9425-B09C40F46014}"/>
               </a:ext>
             </a:extLst>
           </p:cNvPr>
@@ -6352,7 +6428,7 @@
         </p:blipFill>
         <p:spPr>
           <a:xfrm>
-            <a:off x="199856" y="5251543"/>
+            <a:off x="9335482" y="5479317"/>
             <a:ext cx="1404790" cy="1053592"/>
           </a:xfrm>
           <a:prstGeom prst="rect">
@@ -6362,10 +6438,10 @@
       </p:pic>
       <p:pic>
         <p:nvPicPr>
-          <p:cNvPr id="27" name="Picture 26">
-            <a:extLst>
-              <a:ext uri="{FF2B5EF4-FFF2-40B4-BE49-F238E27FC236}">
-                <a16:creationId xmlns:a16="http://schemas.microsoft.com/office/drawing/2014/main" id="{29AA9536-D3E0-45CA-2A00-B6F5BF63C654}"/>
+          <p:cNvPr id="32" name="Picture 31">
+            <a:extLst>
+              <a:ext uri="{FF2B5EF4-FFF2-40B4-BE49-F238E27FC236}">
+                <a16:creationId xmlns:a16="http://schemas.microsoft.com/office/drawing/2014/main" id="{3B51A0A5-104D-BA37-D269-08285547BEC3}"/>
               </a:ext>
             </a:extLst>
           </p:cNvPr>
@@ -6388,7 +6464,7 @@
         </p:blipFill>
         <p:spPr>
           <a:xfrm>
-            <a:off x="1480640" y="5264638"/>
+            <a:off x="10616266" y="5492412"/>
             <a:ext cx="1404790" cy="1053592"/>
           </a:xfrm>
           <a:prstGeom prst="rect">
@@ -6396,82 +6472,6 @@
           </a:prstGeom>
         </p:spPr>
       </p:pic>
-      <p:sp>
-        <p:nvSpPr>
-          <p:cNvPr id="28" name="TextBox 27">
-            <a:extLst>
-              <a:ext uri="{FF2B5EF4-FFF2-40B4-BE49-F238E27FC236}">
-                <a16:creationId xmlns:a16="http://schemas.microsoft.com/office/drawing/2014/main" id="{FEFA54CF-3D01-218F-7EDC-1DF8E359EFA1}"/>
-              </a:ext>
-            </a:extLst>
-          </p:cNvPr>
-          <p:cNvSpPr txBox="1"/>
-          <p:nvPr/>
-        </p:nvSpPr>
-        <p:spPr>
-          <a:xfrm>
-            <a:off x="999446" y="221433"/>
-            <a:ext cx="2642616" cy="369332"/>
-          </a:xfrm>
-          <a:prstGeom prst="rect">
-            <a:avLst/>
-          </a:prstGeom>
-          <a:noFill/>
-        </p:spPr>
-        <p:txBody>
-          <a:bodyPr wrap="square" rtlCol="0">
-            <a:spAutoFit/>
-          </a:bodyPr>
-          <a:lstStyle/>
-          <a:p>
-            <a:r>
-              <a:rPr lang="en-US" dirty="0">
-                <a:latin typeface="Times New Roman" panose="02020603050405020304" pitchFamily="18" charset="0"/>
-                <a:cs typeface="Times New Roman" panose="02020603050405020304" pitchFamily="18" charset="0"/>
-              </a:rPr>
-              <a:t>Counts : 120k (@1mW) </a:t>
-            </a:r>
-          </a:p>
-        </p:txBody>
-      </p:sp>
-      <p:sp>
-        <p:nvSpPr>
-          <p:cNvPr id="29" name="TextBox 28">
-            <a:extLst>
-              <a:ext uri="{FF2B5EF4-FFF2-40B4-BE49-F238E27FC236}">
-                <a16:creationId xmlns:a16="http://schemas.microsoft.com/office/drawing/2014/main" id="{69BEED2C-58B2-1901-0709-84C325EEB674}"/>
-              </a:ext>
-            </a:extLst>
-          </p:cNvPr>
-          <p:cNvSpPr txBox="1"/>
-          <p:nvPr/>
-        </p:nvSpPr>
-        <p:spPr>
-          <a:xfrm>
-            <a:off x="1562845" y="585380"/>
-            <a:ext cx="2642616" cy="246221"/>
-          </a:xfrm>
-          <a:prstGeom prst="rect">
-            <a:avLst/>
-          </a:prstGeom>
-          <a:noFill/>
-        </p:spPr>
-        <p:txBody>
-          <a:bodyPr wrap="square" rtlCol="0">
-            <a:spAutoFit/>
-          </a:bodyPr>
-          <a:lstStyle/>
-          <a:p>
-            <a:r>
-              <a:rPr lang="en-US" sz="1000" dirty="0">
-                <a:latin typeface="Times New Roman" panose="02020603050405020304" pitchFamily="18" charset="0"/>
-                <a:cs typeface="Times New Roman" panose="02020603050405020304" pitchFamily="18" charset="0"/>
-              </a:rPr>
-              <a:t>Bare nanodiamonds</a:t>
-            </a:r>
-          </a:p>
-        </p:txBody>
-      </p:sp>
     </p:spTree>
     <p:extLst>
       <p:ext uri="{BB962C8B-B14F-4D97-AF65-F5344CB8AC3E}">
